--- a/modulo-05/05.03 - Configurando Anotações ABAP CDS no Backend/05.03_Anotações_ABAP_CDS_para_a_UI.pptx
+++ b/modulo-05/05.03 - Configurando Anotações ABAP CDS no Backend/05.03_Anotações_ABAP_CDS_para_a_UI.pptx
@@ -1728,7 +1728,7 @@
                   <a:srgbClr val="8FA3C7"/>
                 </a:solidFill>
               </a:rPr>
-              <a:t>ABAP Moderno · Módulo 03 — SAP Fiori Elements com OData V4  ·  Aula 3 de 11 — Anotações de UI</a:t>
+              <a:t>ABAP Moderno · Módulo 05 — SAP Fiori Elements com OData V4  ·  Aula 3 de 11 — Anotações de UI</a:t>
             </a:r>
             <a:endParaRPr lang="en-US" sz="900" dirty="0"/>
           </a:p>
@@ -1874,7 +1874,7 @@
                   <a:srgbClr val="556B82"/>
                 </a:solidFill>
               </a:rPr>
-              <a:t>ABAP Moderno · Módulo 03 — SAP Fiori Elements com OData V4  ·  Aula 3 de 11 — Anotações de UI</a:t>
+              <a:t>ABAP Moderno · Módulo 05 — SAP Fiori Elements com OData V4  ·  Aula 3 de 11 — Anotações de UI</a:t>
             </a:r>
             <a:endParaRPr lang="en-US" sz="900" dirty="0"/>
           </a:p>
@@ -2305,7 +2305,7 @@
                   <a:srgbClr val="89D1FF"/>
                 </a:solidFill>
               </a:rPr>
-              <a:t>MÓDULO 03 · AULA 03 DE 11</a:t>
+              <a:t>MÓDULO 05 · AULA 03 DE 11</a:t>
             </a:r>
             <a:endParaRPr lang="en-US" sz="1400" dirty="0"/>
           </a:p>
@@ -2735,7 +2735,7 @@
                   <a:srgbClr val="8FA3C7"/>
                 </a:solidFill>
               </a:rPr>
-              <a:t>ABAP Moderno · Módulo 03 — SAP Fiori Elements com OData V4 · Design System SAP Horizon</a:t>
+              <a:t>ABAP Moderno · Módulo 05 — SAP Fiori Elements com OData V4 · Design System SAP Horizon</a:t>
             </a:r>
             <a:endParaRPr lang="en-US" sz="1100" dirty="0"/>
           </a:p>
@@ -2842,7 +2842,7 @@
                   <a:srgbClr val="89D1FF"/>
                 </a:solidFill>
               </a:rPr>
-              <a:t>AULA 03.03 · SEÇÃO 3</a:t>
+              <a:t>AULA 05.03 · SEÇÃO 3</a:t>
             </a:r>
             <a:endParaRPr lang="en-US" sz="1300" dirty="0"/>
           </a:p>
@@ -3397,7 +3397,7 @@
         <p:spPr>
           <a:xfrm>
             <a:off x="640080" y="1700784"/>
-            <a:ext cx="2852928" cy="292608"/>
+            <a:ext cx="2619756" cy="292608"/>
           </a:xfrm>
           <a:prstGeom prst="rect">
             <a:avLst/>
@@ -3417,7 +3417,7 @@
         <p:spPr>
           <a:xfrm>
             <a:off x="640080" y="1700784"/>
-            <a:ext cx="2852928" cy="27432"/>
+            <a:ext cx="2619756" cy="27432"/>
           </a:xfrm>
           <a:prstGeom prst="rect">
             <a:avLst/>
@@ -3437,7 +3437,7 @@
         <p:spPr>
           <a:xfrm>
             <a:off x="731520" y="1719072"/>
-            <a:ext cx="2670048" cy="274320"/>
+            <a:ext cx="2436876" cy="274320"/>
           </a:xfrm>
           <a:prstGeom prst="rect">
             <a:avLst/>
@@ -3458,7 +3458,7 @@
                   <a:srgbClr val="FFFFFF"/>
                 </a:solidFill>
               </a:rPr>
-              <a:t>zc_fe_travel_######.ddlx.asddlxs</a:t>
+              <a:t>zc_pc_pedido_app.ddlx.asddlxs</a:t>
             </a:r>
             <a:endParaRPr lang="en-US" sz="950" dirty="0"/>
           </a:p>
@@ -3494,7 +3494,7 @@
                   <a:srgbClr val="9DA5B4"/>
                 </a:solidFill>
               </a:rPr>
-              <a:t>ZFE_TRAVEL_###### › Metadata Extensions</a:t>
+              <a:t>Variação de ZC_PC_PEDIDO_APP.ddlx com seção #COLLECTION</a:t>
             </a:r>
             <a:endParaRPr lang="en-US" sz="850" dirty="0"/>
           </a:p>
@@ -3902,73 +3902,7 @@
                 <a:ea typeface="Courier New" pitchFamily="34" charset="-122"/>
                 <a:cs typeface="Courier New" pitchFamily="34" charset="-120"/>
               </a:rPr>
-              <a:t>ZC_FE_TRAVEL_</a:t>
-            </a:r>
-            <a:r>
-              <a:rPr lang="en-US" sz="1050" dirty="0">
-                <a:solidFill>
-                  <a:srgbClr val="CCCCCC"/>
-                </a:solidFill>
-                <a:latin typeface="Courier New" pitchFamily="34" charset="0"/>
-                <a:ea typeface="Courier New" pitchFamily="34" charset="-122"/>
-                <a:cs typeface="Courier New" pitchFamily="34" charset="-120"/>
-              </a:rPr>
-              <a:t>#</a:t>
-            </a:r>
-            <a:r>
-              <a:rPr lang="en-US" sz="1050" dirty="0">
-                <a:solidFill>
-                  <a:srgbClr val="CCCCCC"/>
-                </a:solidFill>
-                <a:latin typeface="Courier New" pitchFamily="34" charset="0"/>
-                <a:ea typeface="Courier New" pitchFamily="34" charset="-122"/>
-                <a:cs typeface="Courier New" pitchFamily="34" charset="-120"/>
-              </a:rPr>
-              <a:t>#</a:t>
-            </a:r>
-            <a:r>
-              <a:rPr lang="en-US" sz="1050" dirty="0">
-                <a:solidFill>
-                  <a:srgbClr val="CCCCCC"/>
-                </a:solidFill>
-                <a:latin typeface="Courier New" pitchFamily="34" charset="0"/>
-                <a:ea typeface="Courier New" pitchFamily="34" charset="-122"/>
-                <a:cs typeface="Courier New" pitchFamily="34" charset="-120"/>
-              </a:rPr>
-              <a:t>#</a:t>
-            </a:r>
-            <a:r>
-              <a:rPr lang="en-US" sz="1050" dirty="0">
-                <a:solidFill>
-                  <a:srgbClr val="CCCCCC"/>
-                </a:solidFill>
-                <a:latin typeface="Courier New" pitchFamily="34" charset="0"/>
-                <a:ea typeface="Courier New" pitchFamily="34" charset="-122"/>
-                <a:cs typeface="Courier New" pitchFamily="34" charset="-120"/>
-              </a:rPr>
-              <a:t>#</a:t>
-            </a:r>
-            <a:r>
-              <a:rPr lang="en-US" sz="1050" dirty="0">
-                <a:solidFill>
-                  <a:srgbClr val="CCCCCC"/>
-                </a:solidFill>
-                <a:latin typeface="Courier New" pitchFamily="34" charset="0"/>
-                <a:ea typeface="Courier New" pitchFamily="34" charset="-122"/>
-                <a:cs typeface="Courier New" pitchFamily="34" charset="-120"/>
-              </a:rPr>
-              <a:t>#</a:t>
-            </a:r>
-            <a:r>
-              <a:rPr lang="en-US" sz="1050" dirty="0">
-                <a:solidFill>
-                  <a:srgbClr val="CCCCCC"/>
-                </a:solidFill>
-                <a:latin typeface="Courier New" pitchFamily="34" charset="0"/>
-                <a:ea typeface="Courier New" pitchFamily="34" charset="-122"/>
-                <a:cs typeface="Courier New" pitchFamily="34" charset="-120"/>
-              </a:rPr>
-              <a:t>#</a:t>
+              <a:t>ZC_PC_PEDIDO_APP</a:t>
             </a:r>
             <a:r>
               <a:rPr lang="en-US" sz="1050" dirty="0">
@@ -4193,7 +4127,7 @@
                 <a:ea typeface="Courier New" pitchFamily="34" charset="-122"/>
                 <a:cs typeface="Courier New" pitchFamily="34" charset="-120"/>
               </a:rPr>
-              <a:t>'GeneralInfo'</a:t>
+              <a:t>'DadosGerais'</a:t>
             </a:r>
             <a:r>
               <a:rPr lang="en-US" sz="1050" dirty="0">
@@ -4345,7 +4279,7 @@
                 <a:ea typeface="Courier New" pitchFamily="34" charset="-122"/>
                 <a:cs typeface="Courier New" pitchFamily="34" charset="-120"/>
               </a:rPr>
-              <a:t>'General Information'</a:t>
+              <a:t>'Dados do Pedido'</a:t>
             </a:r>
             <a:r>
               <a:rPr lang="en-US" sz="1050" dirty="0">
@@ -4411,7 +4345,7 @@
                 <a:ea typeface="Courier New" pitchFamily="34" charset="-122"/>
                 <a:cs typeface="Courier New" pitchFamily="34" charset="-120"/>
               </a:rPr>
-              <a:t>10</a:t>
+              <a:t>20</a:t>
             </a:r>
             <a:r>
               <a:rPr lang="en-US" sz="1050" dirty="0">
@@ -4530,7 +4464,7 @@
                 <a:ea typeface="Courier New" pitchFamily="34" charset="-122"/>
                 <a:cs typeface="Courier New" pitchFamily="34" charset="-120"/>
               </a:rPr>
-              <a:t>'General'</a:t>
+              <a:t>'Pedido'</a:t>
             </a:r>
             <a:r>
               <a:rPr lang="en-US" sz="1050" dirty="0">
@@ -4682,7 +4616,7 @@
                 <a:ea typeface="Courier New" pitchFamily="34" charset="-122"/>
                 <a:cs typeface="Courier New" pitchFamily="34" charset="-120"/>
               </a:rPr>
-              <a:t>'GeneralInfo'</a:t>
+              <a:t>'DadosGerais'</a:t>
             </a:r>
             <a:r>
               <a:rPr lang="en-US" sz="1050" dirty="0">
@@ -4929,6 +4863,72 @@
                 <a:ea typeface="Courier New" pitchFamily="34" charset="-122"/>
                 <a:cs typeface="Courier New" pitchFamily="34" charset="-120"/>
               </a:rPr>
+              <a:t>,</a:t>
+            </a:r>
+            <a:r>
+              <a:rPr lang="en-US" sz="1050" dirty="0">
+                <a:solidFill>
+                  <a:srgbClr val="CCCCCC"/>
+                </a:solidFill>
+                <a:latin typeface="Courier New" pitchFamily="34" charset="0"/>
+                <a:ea typeface="Courier New" pitchFamily="34" charset="-122"/>
+                <a:cs typeface="Courier New" pitchFamily="34" charset="-120"/>
+              </a:rPr>
+              <a:t> </a:t>
+            </a:r>
+            <a:r>
+              <a:rPr lang="en-US" sz="1050" dirty="0">
+                <a:solidFill>
+                  <a:srgbClr val="CCCCCC"/>
+                </a:solidFill>
+                <a:latin typeface="Courier New" pitchFamily="34" charset="0"/>
+                <a:ea typeface="Courier New" pitchFamily="34" charset="-122"/>
+                <a:cs typeface="Courier New" pitchFamily="34" charset="-120"/>
+              </a:rPr>
+              <a:t>label</a:t>
+            </a:r>
+            <a:r>
+              <a:rPr lang="en-US" sz="1050" dirty="0">
+                <a:solidFill>
+                  <a:srgbClr val="CCCCCC"/>
+                </a:solidFill>
+                <a:latin typeface="Courier New" pitchFamily="34" charset="0"/>
+                <a:ea typeface="Courier New" pitchFamily="34" charset="-122"/>
+                <a:cs typeface="Courier New" pitchFamily="34" charset="-120"/>
+              </a:rPr>
+              <a:t>:</a:t>
+            </a:r>
+            <a:r>
+              <a:rPr lang="en-US" sz="1050" dirty="0">
+                <a:solidFill>
+                  <a:srgbClr val="CCCCCC"/>
+                </a:solidFill>
+                <a:latin typeface="Courier New" pitchFamily="34" charset="0"/>
+                <a:ea typeface="Courier New" pitchFamily="34" charset="-122"/>
+                <a:cs typeface="Courier New" pitchFamily="34" charset="-120"/>
+              </a:rPr>
+              <a:t> </a:t>
+            </a:r>
+            <a:r>
+              <a:rPr lang="en-US" sz="1050" dirty="0">
+                <a:solidFill>
+                  <a:srgbClr val="CE9178"/>
+                </a:solidFill>
+                <a:latin typeface="Courier New" pitchFamily="34" charset="0"/>
+                <a:ea typeface="Courier New" pitchFamily="34" charset="-122"/>
+                <a:cs typeface="Courier New" pitchFamily="34" charset="-120"/>
+              </a:rPr>
+              <a:t>'Número do pedido'</a:t>
+            </a:r>
+            <a:r>
+              <a:rPr lang="en-US" sz="1050" dirty="0">
+                <a:solidFill>
+                  <a:srgbClr val="CCCCCC"/>
+                </a:solidFill>
+                <a:latin typeface="Courier New" pitchFamily="34" charset="0"/>
+                <a:ea typeface="Courier New" pitchFamily="34" charset="-122"/>
+                <a:cs typeface="Courier New" pitchFamily="34" charset="-120"/>
+              </a:rPr>
               <a:t> </a:t>
             </a:r>
             <a:r>
@@ -4982,7 +4982,7 @@
                 <a:ea typeface="Courier New" pitchFamily="34" charset="-122"/>
                 <a:cs typeface="Courier New" pitchFamily="34" charset="-120"/>
               </a:rPr>
-              <a:t>AgencyID</a:t>
+              <a:t>NumeroPedido</a:t>
             </a:r>
             <a:r>
               <a:rPr lang="en-US" sz="1050" dirty="0">
@@ -5176,7 +5176,73 @@
                 <a:ea typeface="Courier New" pitchFamily="34" charset="-122"/>
                 <a:cs typeface="Courier New" pitchFamily="34" charset="-120"/>
               </a:rPr>
-              <a:t>20</a:t>
+              <a:t>40</a:t>
+            </a:r>
+            <a:r>
+              <a:rPr lang="en-US" sz="1050" dirty="0">
+                <a:solidFill>
+                  <a:srgbClr val="CCCCCC"/>
+                </a:solidFill>
+                <a:latin typeface="Courier New" pitchFamily="34" charset="0"/>
+                <a:ea typeface="Courier New" pitchFamily="34" charset="-122"/>
+                <a:cs typeface="Courier New" pitchFamily="34" charset="-120"/>
+              </a:rPr>
+              <a:t>,</a:t>
+            </a:r>
+            <a:r>
+              <a:rPr lang="en-US" sz="1050" dirty="0">
+                <a:solidFill>
+                  <a:srgbClr val="CCCCCC"/>
+                </a:solidFill>
+                <a:latin typeface="Courier New" pitchFamily="34" charset="0"/>
+                <a:ea typeface="Courier New" pitchFamily="34" charset="-122"/>
+                <a:cs typeface="Courier New" pitchFamily="34" charset="-120"/>
+              </a:rPr>
+              <a:t> </a:t>
+            </a:r>
+            <a:r>
+              <a:rPr lang="en-US" sz="1050" dirty="0">
+                <a:solidFill>
+                  <a:srgbClr val="CCCCCC"/>
+                </a:solidFill>
+                <a:latin typeface="Courier New" pitchFamily="34" charset="0"/>
+                <a:ea typeface="Courier New" pitchFamily="34" charset="-122"/>
+                <a:cs typeface="Courier New" pitchFamily="34" charset="-120"/>
+              </a:rPr>
+              <a:t>label</a:t>
+            </a:r>
+            <a:r>
+              <a:rPr lang="en-US" sz="1050" dirty="0">
+                <a:solidFill>
+                  <a:srgbClr val="CCCCCC"/>
+                </a:solidFill>
+                <a:latin typeface="Courier New" pitchFamily="34" charset="0"/>
+                <a:ea typeface="Courier New" pitchFamily="34" charset="-122"/>
+                <a:cs typeface="Courier New" pitchFamily="34" charset="-120"/>
+              </a:rPr>
+              <a:t>:</a:t>
+            </a:r>
+            <a:r>
+              <a:rPr lang="en-US" sz="1050" dirty="0">
+                <a:solidFill>
+                  <a:srgbClr val="CCCCCC"/>
+                </a:solidFill>
+                <a:latin typeface="Courier New" pitchFamily="34" charset="0"/>
+                <a:ea typeface="Courier New" pitchFamily="34" charset="-122"/>
+                <a:cs typeface="Courier New" pitchFamily="34" charset="-120"/>
+              </a:rPr>
+              <a:t> </a:t>
+            </a:r>
+            <a:r>
+              <a:rPr lang="en-US" sz="1050" dirty="0">
+                <a:solidFill>
+                  <a:srgbClr val="CE9178"/>
+                </a:solidFill>
+                <a:latin typeface="Courier New" pitchFamily="34" charset="0"/>
+                <a:ea typeface="Courier New" pitchFamily="34" charset="-122"/>
+                <a:cs typeface="Courier New" pitchFamily="34" charset="-120"/>
+              </a:rPr>
+              <a:t>'Status do pedido'</a:t>
             </a:r>
             <a:r>
               <a:rPr lang="en-US" sz="1050" dirty="0">
@@ -5240,7 +5306,7 @@
                 <a:ea typeface="Courier New" pitchFamily="34" charset="-122"/>
                 <a:cs typeface="Courier New" pitchFamily="34" charset="-120"/>
               </a:rPr>
-              <a:t>CustomerID</a:t>
+              <a:t>StatusPedido</a:t>
             </a:r>
             <a:r>
               <a:rPr lang="en-US" sz="1050" dirty="0">
@@ -5821,7 +5887,7 @@
                 <a:ea typeface="Courier New" pitchFamily="34" charset="-122"/>
                 <a:cs typeface="Courier New" pitchFamily="34" charset="-120"/>
               </a:rPr>
-              <a:t>GeneralInfo</a:t>
+              <a:t>DadosGerais</a:t>
             </a:r>
             <a:r>
               <a:rPr lang="en-US" sz="1050" dirty="0">
@@ -7223,7 +7289,7 @@
                   <a:srgbClr val="FFFFFF"/>
                 </a:solidFill>
               </a:rPr>
-              <a:t>O que aprendemos na aula 03.03</a:t>
+              <a:t>O que aprendemos na aula 05.03</a:t>
             </a:r>
             <a:endParaRPr lang="en-US" sz="3200" dirty="0"/>
           </a:p>
@@ -7803,7 +7869,7 @@
                   <a:srgbClr val="89D1FF"/>
                 </a:solidFill>
               </a:rPr>
-              <a:t>Próxima aula · 03.04  </a:t>
+              <a:t>Próxima aula · 05.04  </a:t>
             </a:r>
             <a:r>
               <a:rPr lang="en-US" sz="1500" dirty="0">
@@ -7905,7 +7971,7 @@
         </p:blipFill>
         <p:spPr>
           <a:xfrm>
-            <a:off x="6355080" y="3886200"/>
+            <a:off x="6355080" y="2926080"/>
             <a:ext cx="256032" cy="256032"/>
           </a:xfrm>
           <a:prstGeom prst="rect">
@@ -7929,7 +7995,7 @@
         </p:blipFill>
         <p:spPr>
           <a:xfrm>
-            <a:off x="6355080" y="2926080"/>
+            <a:off x="822960" y="3886200"/>
             <a:ext cx="256032" cy="256032"/>
           </a:xfrm>
           <a:prstGeom prst="rect">
@@ -7953,7 +8019,7 @@
         </p:blipFill>
         <p:spPr>
           <a:xfrm>
-            <a:off x="822960" y="3886200"/>
+            <a:off x="6355080" y="3886200"/>
             <a:ext cx="256032" cy="256032"/>
           </a:xfrm>
           <a:prstGeom prst="rect">
@@ -8080,7 +8146,7 @@
                   <a:srgbClr val="1D2D3E"/>
                 </a:solidFill>
               </a:rPr>
-              <a:t>Módulo 03 em 11 aulas: Fiori Elements com OData V4</a:t>
+              <a:t>Módulo 05 em 11 aulas: Fiori Elements com OData V4</a:t>
             </a:r>
             <a:endParaRPr lang="en-US" sz="2800" dirty="0"/>
           </a:p>
@@ -9972,7 +10038,7 @@
         </p:blipFill>
         <p:spPr>
           <a:xfrm>
-            <a:off x="1696669" y="1847088"/>
+            <a:off x="3576218" y="1847088"/>
             <a:ext cx="347472" cy="347472"/>
           </a:xfrm>
           <a:prstGeom prst="rect">
@@ -9996,7 +10062,7 @@
         </p:blipFill>
         <p:spPr>
           <a:xfrm>
-            <a:off x="3576218" y="1847088"/>
+            <a:off x="1696669" y="1847088"/>
             <a:ext cx="347472" cy="347472"/>
           </a:xfrm>
           <a:prstGeom prst="rect">
@@ -10020,7 +10086,7 @@
         </p:blipFill>
         <p:spPr>
           <a:xfrm>
-            <a:off x="5455768" y="1847088"/>
+            <a:off x="7335317" y="1847088"/>
             <a:ext cx="347472" cy="347472"/>
           </a:xfrm>
           <a:prstGeom prst="rect">
@@ -10044,7 +10110,7 @@
         </p:blipFill>
         <p:spPr>
           <a:xfrm>
-            <a:off x="7335317" y="1847088"/>
+            <a:off x="5455768" y="1847088"/>
             <a:ext cx="347472" cy="347472"/>
           </a:xfrm>
           <a:prstGeom prst="rect">
@@ -10116,7 +10182,7 @@
         </p:blipFill>
         <p:spPr>
           <a:xfrm>
-            <a:off x="1696669" y="3858768"/>
+            <a:off x="5455768" y="3858768"/>
             <a:ext cx="347472" cy="347472"/>
           </a:xfrm>
           <a:prstGeom prst="rect">
@@ -10140,7 +10206,7 @@
         </p:blipFill>
         <p:spPr>
           <a:xfrm>
-            <a:off x="5455768" y="3858768"/>
+            <a:off x="3576218" y="3858768"/>
             <a:ext cx="347472" cy="347472"/>
           </a:xfrm>
           <a:prstGeom prst="rect">
@@ -10164,7 +10230,7 @@
         </p:blipFill>
         <p:spPr>
           <a:xfrm>
-            <a:off x="3576218" y="3858768"/>
+            <a:off x="1696669" y="3858768"/>
             <a:ext cx="347472" cy="347472"/>
           </a:xfrm>
           <a:prstGeom prst="rect">
@@ -10959,8 +11025,8 @@
         </p:blipFill>
         <p:spPr>
           <a:xfrm>
-            <a:off x="877824" y="2577751"/>
-            <a:ext cx="256032" cy="256032"/>
+            <a:off x="749808" y="5176361"/>
+            <a:ext cx="310896" cy="310896"/>
           </a:xfrm>
           <a:prstGeom prst="rect">
             <a:avLst/>
@@ -10983,7 +11049,7 @@
         </p:blipFill>
         <p:spPr>
           <a:xfrm>
-            <a:off x="6562192" y="2577751"/>
+            <a:off x="877824" y="2577751"/>
             <a:ext cx="256032" cy="256032"/>
           </a:xfrm>
           <a:prstGeom prst="rect">
@@ -11007,8 +11073,8 @@
         </p:blipFill>
         <p:spPr>
           <a:xfrm>
-            <a:off x="749808" y="5176361"/>
-            <a:ext cx="310896" cy="310896"/>
+            <a:off x="6562192" y="2577751"/>
+            <a:ext cx="256032" cy="256032"/>
           </a:xfrm>
           <a:prstGeom prst="rect">
             <a:avLst/>
@@ -11137,7 +11203,7 @@
                   <a:srgbClr val="89D1FF"/>
                 </a:solidFill>
               </a:rPr>
-              <a:t>AULA 03.03 · SEÇÃO 1</a:t>
+              <a:t>AULA 05.03 · SEÇÃO 1</a:t>
             </a:r>
             <a:endParaRPr lang="en-US" sz="1300" dirty="0"/>
           </a:p>
@@ -11209,7 +11275,7 @@
                   <a:srgbClr val="D1EFFF"/>
                 </a:solidFill>
               </a:rPr>
-              <a:t>A projeção do Travel libera a extensão, traz o texto do status e o campo de </a:t>
+              <a:t>A projeção do pedido libera a extensão, traz o texto do status e o campo de </a:t>
             </a:r>
             <a:r>
               <a:rPr lang="en-US" sz="1600" b="1" dirty="0">
@@ -11660,7 +11726,7 @@
         <p:spPr>
           <a:xfrm>
             <a:off x="640080" y="1700784"/>
-            <a:ext cx="2775204" cy="292608"/>
+            <a:ext cx="2542032" cy="292608"/>
           </a:xfrm>
           <a:prstGeom prst="rect">
             <a:avLst/>
@@ -11680,7 +11746,7 @@
         <p:spPr>
           <a:xfrm>
             <a:off x="640080" y="1700784"/>
-            <a:ext cx="2775204" cy="27432"/>
+            <a:ext cx="2542032" cy="27432"/>
           </a:xfrm>
           <a:prstGeom prst="rect">
             <a:avLst/>
@@ -11700,7 +11766,7 @@
         <p:spPr>
           <a:xfrm>
             <a:off x="731520" y="1719072"/>
-            <a:ext cx="2592324" cy="274320"/>
+            <a:ext cx="2359152" cy="274320"/>
           </a:xfrm>
           <a:prstGeom prst="rect">
             <a:avLst/>
@@ -11721,7 +11787,7 @@
                   <a:srgbClr val="FFFFFF"/>
                 </a:solidFill>
               </a:rPr>
-              <a:t>zc_fe_travel_######.ddls.asddls</a:t>
+              <a:t>zc_pc_pedido_app.ddls.asddls</a:t>
             </a:r>
             <a:endParaRPr lang="en-US" sz="950" dirty="0"/>
           </a:p>
@@ -11757,7 +11823,7 @@
                   <a:srgbClr val="9DA5B4"/>
                 </a:solidFill>
               </a:rPr>
-              <a:t>ZFE_TRAVEL_###### › Data Definitions</a:t>
+              <a:t>ZAVBS_PC_PEDIDOS › ZC_PC_PEDIDO_APP (simplificada)</a:t>
             </a:r>
             <a:endParaRPr lang="en-US" sz="850" dirty="0"/>
           </a:p>
@@ -12433,7 +12499,51 @@
                 <a:ea typeface="Courier New" pitchFamily="34" charset="-122"/>
                 <a:cs typeface="Courier New" pitchFamily="34" charset="-120"/>
               </a:rPr>
-              <a:t>define</a:t>
+              <a:t>@</a:t>
+            </a:r>
+            <a:r>
+              <a:rPr lang="en-US" sz="900" dirty="0">
+                <a:solidFill>
+                  <a:srgbClr val="CCCCCC"/>
+                </a:solidFill>
+                <a:latin typeface="Courier New" pitchFamily="34" charset="0"/>
+                <a:ea typeface="Courier New" pitchFamily="34" charset="-122"/>
+                <a:cs typeface="Courier New" pitchFamily="34" charset="-120"/>
+              </a:rPr>
+              <a:t>ObjectModel</a:t>
+            </a:r>
+            <a:r>
+              <a:rPr lang="en-US" sz="900" dirty="0">
+                <a:solidFill>
+                  <a:srgbClr val="CCCCCC"/>
+                </a:solidFill>
+                <a:latin typeface="Courier New" pitchFamily="34" charset="0"/>
+                <a:ea typeface="Courier New" pitchFamily="34" charset="-122"/>
+                <a:cs typeface="Courier New" pitchFamily="34" charset="-120"/>
+              </a:rPr>
+              <a:t>.</a:t>
+            </a:r>
+            <a:r>
+              <a:rPr lang="en-US" sz="900" dirty="0">
+                <a:solidFill>
+                  <a:srgbClr val="CCCCCC"/>
+                </a:solidFill>
+                <a:latin typeface="Courier New" pitchFamily="34" charset="0"/>
+                <a:ea typeface="Courier New" pitchFamily="34" charset="-122"/>
+                <a:cs typeface="Courier New" pitchFamily="34" charset="-120"/>
+              </a:rPr>
+              <a:t>semanticKey</a:t>
+            </a:r>
+            <a:r>
+              <a:rPr lang="en-US" sz="900" dirty="0">
+                <a:solidFill>
+                  <a:srgbClr val="CCCCCC"/>
+                </a:solidFill>
+                <a:latin typeface="Courier New" pitchFamily="34" charset="0"/>
+                <a:ea typeface="Courier New" pitchFamily="34" charset="-122"/>
+                <a:cs typeface="Courier New" pitchFamily="34" charset="-120"/>
+              </a:rPr>
+              <a:t>:</a:t>
             </a:r>
             <a:r>
               <a:rPr lang="en-US" sz="900" dirty="0">
@@ -12455,7 +12565,7 @@
                 <a:ea typeface="Courier New" pitchFamily="34" charset="-122"/>
                 <a:cs typeface="Courier New" pitchFamily="34" charset="-120"/>
               </a:rPr>
-              <a:t>root</a:t>
+              <a:t>[</a:t>
             </a:r>
             <a:r>
               <a:rPr lang="en-US" sz="900" dirty="0">
@@ -12471,13 +12581,13 @@
             <a:r>
               <a:rPr lang="en-US" sz="900" dirty="0">
                 <a:solidFill>
-                  <a:srgbClr val="CCCCCC"/>
-                </a:solidFill>
-                <a:latin typeface="Courier New" pitchFamily="34" charset="0"/>
-                <a:ea typeface="Courier New" pitchFamily="34" charset="-122"/>
-                <a:cs typeface="Courier New" pitchFamily="34" charset="-120"/>
-              </a:rPr>
-              <a:t>view</a:t>
+                  <a:srgbClr val="CE9178"/>
+                </a:solidFill>
+                <a:latin typeface="Courier New" pitchFamily="34" charset="0"/>
+                <a:ea typeface="Courier New" pitchFamily="34" charset="-122"/>
+                <a:cs typeface="Courier New" pitchFamily="34" charset="-120"/>
+              </a:rPr>
+              <a:t>'NumeroPedido'</a:t>
             </a:r>
             <a:r>
               <a:rPr lang="en-US" sz="900" dirty="0">
@@ -12499,95 +12609,7 @@
                 <a:ea typeface="Courier New" pitchFamily="34" charset="-122"/>
                 <a:cs typeface="Courier New" pitchFamily="34" charset="-120"/>
               </a:rPr>
-              <a:t>entity</a:t>
-            </a:r>
-            <a:r>
-              <a:rPr lang="en-US" sz="900" dirty="0">
-                <a:solidFill>
-                  <a:srgbClr val="CCCCCC"/>
-                </a:solidFill>
-                <a:latin typeface="Courier New" pitchFamily="34" charset="0"/>
-                <a:ea typeface="Courier New" pitchFamily="34" charset="-122"/>
-                <a:cs typeface="Courier New" pitchFamily="34" charset="-120"/>
-              </a:rPr>
-              <a:t> </a:t>
-            </a:r>
-            <a:r>
-              <a:rPr lang="en-US" sz="900" dirty="0">
-                <a:solidFill>
-                  <a:srgbClr val="CCCCCC"/>
-                </a:solidFill>
-                <a:latin typeface="Courier New" pitchFamily="34" charset="0"/>
-                <a:ea typeface="Courier New" pitchFamily="34" charset="-122"/>
-                <a:cs typeface="Courier New" pitchFamily="34" charset="-120"/>
-              </a:rPr>
-              <a:t>ZC_FE_TRAVEL_</a:t>
-            </a:r>
-            <a:r>
-              <a:rPr lang="en-US" sz="900" dirty="0">
-                <a:solidFill>
-                  <a:srgbClr val="CCCCCC"/>
-                </a:solidFill>
-                <a:latin typeface="Courier New" pitchFamily="34" charset="0"/>
-                <a:ea typeface="Courier New" pitchFamily="34" charset="-122"/>
-                <a:cs typeface="Courier New" pitchFamily="34" charset="-120"/>
-              </a:rPr>
-              <a:t>#</a:t>
-            </a:r>
-            <a:r>
-              <a:rPr lang="en-US" sz="900" dirty="0">
-                <a:solidFill>
-                  <a:srgbClr val="CCCCCC"/>
-                </a:solidFill>
-                <a:latin typeface="Courier New" pitchFamily="34" charset="0"/>
-                <a:ea typeface="Courier New" pitchFamily="34" charset="-122"/>
-                <a:cs typeface="Courier New" pitchFamily="34" charset="-120"/>
-              </a:rPr>
-              <a:t>#</a:t>
-            </a:r>
-            <a:r>
-              <a:rPr lang="en-US" sz="900" dirty="0">
-                <a:solidFill>
-                  <a:srgbClr val="CCCCCC"/>
-                </a:solidFill>
-                <a:latin typeface="Courier New" pitchFamily="34" charset="0"/>
-                <a:ea typeface="Courier New" pitchFamily="34" charset="-122"/>
-                <a:cs typeface="Courier New" pitchFamily="34" charset="-120"/>
-              </a:rPr>
-              <a:t>#</a:t>
-            </a:r>
-            <a:r>
-              <a:rPr lang="en-US" sz="900" dirty="0">
-                <a:solidFill>
-                  <a:srgbClr val="CCCCCC"/>
-                </a:solidFill>
-                <a:latin typeface="Courier New" pitchFamily="34" charset="0"/>
-                <a:ea typeface="Courier New" pitchFamily="34" charset="-122"/>
-                <a:cs typeface="Courier New" pitchFamily="34" charset="-120"/>
-              </a:rPr>
-              <a:t>#</a:t>
-            </a:r>
-            <a:r>
-              <a:rPr lang="en-US" sz="900" dirty="0">
-                <a:solidFill>
-                  <a:srgbClr val="CCCCCC"/>
-                </a:solidFill>
-                <a:latin typeface="Courier New" pitchFamily="34" charset="0"/>
-                <a:ea typeface="Courier New" pitchFamily="34" charset="-122"/>
-                <a:cs typeface="Courier New" pitchFamily="34" charset="-120"/>
-              </a:rPr>
-              <a:t>#</a:t>
-            </a:r>
-            <a:r>
-              <a:rPr lang="en-US" sz="900" dirty="0">
-                <a:solidFill>
-                  <a:srgbClr val="CCCCCC"/>
-                </a:solidFill>
-                <a:latin typeface="Courier New" pitchFamily="34" charset="0"/>
-                <a:ea typeface="Courier New" pitchFamily="34" charset="-122"/>
-                <a:cs typeface="Courier New" pitchFamily="34" charset="-120"/>
-              </a:rPr>
-              <a:t>#</a:t>
+              <a:t>]</a:t>
             </a:r>
             <a:endParaRPr lang="en-US" sz="900" dirty="0"/>
           </a:p>
@@ -12607,18 +12629,7 @@
                 <a:ea typeface="Courier New" pitchFamily="34" charset="-122"/>
                 <a:cs typeface="Courier New" pitchFamily="34" charset="-120"/>
               </a:rPr>
-              <a:t>  </a:t>
-            </a:r>
-            <a:r>
-              <a:rPr lang="en-US" sz="900" dirty="0">
-                <a:solidFill>
-                  <a:srgbClr val="CCCCCC"/>
-                </a:solidFill>
-                <a:latin typeface="Courier New" pitchFamily="34" charset="0"/>
-                <a:ea typeface="Courier New" pitchFamily="34" charset="-122"/>
-                <a:cs typeface="Courier New" pitchFamily="34" charset="-120"/>
-              </a:rPr>
-              <a:t>provider</a:t>
+              <a:t>define</a:t>
             </a:r>
             <a:r>
               <a:rPr lang="en-US" sz="900" dirty="0">
@@ -12640,7 +12651,7 @@
                 <a:ea typeface="Courier New" pitchFamily="34" charset="-122"/>
                 <a:cs typeface="Courier New" pitchFamily="34" charset="-120"/>
               </a:rPr>
-              <a:t>contract</a:t>
+              <a:t>root</a:t>
             </a:r>
             <a:r>
               <a:rPr lang="en-US" sz="900" dirty="0">
@@ -12662,7 +12673,51 @@
                 <a:ea typeface="Courier New" pitchFamily="34" charset="-122"/>
                 <a:cs typeface="Courier New" pitchFamily="34" charset="-120"/>
               </a:rPr>
-              <a:t>transactional_query</a:t>
+              <a:t>view</a:t>
+            </a:r>
+            <a:r>
+              <a:rPr lang="en-US" sz="900" dirty="0">
+                <a:solidFill>
+                  <a:srgbClr val="CCCCCC"/>
+                </a:solidFill>
+                <a:latin typeface="Courier New" pitchFamily="34" charset="0"/>
+                <a:ea typeface="Courier New" pitchFamily="34" charset="-122"/>
+                <a:cs typeface="Courier New" pitchFamily="34" charset="-120"/>
+              </a:rPr>
+              <a:t> </a:t>
+            </a:r>
+            <a:r>
+              <a:rPr lang="en-US" sz="900" dirty="0">
+                <a:solidFill>
+                  <a:srgbClr val="CCCCCC"/>
+                </a:solidFill>
+                <a:latin typeface="Courier New" pitchFamily="34" charset="0"/>
+                <a:ea typeface="Courier New" pitchFamily="34" charset="-122"/>
+                <a:cs typeface="Courier New" pitchFamily="34" charset="-120"/>
+              </a:rPr>
+              <a:t>entity</a:t>
+            </a:r>
+            <a:r>
+              <a:rPr lang="en-US" sz="900" dirty="0">
+                <a:solidFill>
+                  <a:srgbClr val="CCCCCC"/>
+                </a:solidFill>
+                <a:latin typeface="Courier New" pitchFamily="34" charset="0"/>
+                <a:ea typeface="Courier New" pitchFamily="34" charset="-122"/>
+                <a:cs typeface="Courier New" pitchFamily="34" charset="-120"/>
+              </a:rPr>
+              <a:t> </a:t>
+            </a:r>
+            <a:r>
+              <a:rPr lang="en-US" sz="900" dirty="0">
+                <a:solidFill>
+                  <a:srgbClr val="CCCCCC"/>
+                </a:solidFill>
+                <a:latin typeface="Courier New" pitchFamily="34" charset="0"/>
+                <a:ea typeface="Courier New" pitchFamily="34" charset="-122"/>
+                <a:cs typeface="Courier New" pitchFamily="34" charset="-120"/>
+              </a:rPr>
+              <a:t>ZC_PC_PEDIDO_APP</a:t>
             </a:r>
             <a:endParaRPr lang="en-US" sz="900" dirty="0"/>
           </a:p>
@@ -12693,7 +12748,7 @@
                 <a:ea typeface="Courier New" pitchFamily="34" charset="-122"/>
                 <a:cs typeface="Courier New" pitchFamily="34" charset="-120"/>
               </a:rPr>
-              <a:t>as</a:t>
+              <a:t>provider</a:t>
             </a:r>
             <a:r>
               <a:rPr lang="en-US" sz="900" dirty="0">
@@ -12715,7 +12770,7 @@
                 <a:ea typeface="Courier New" pitchFamily="34" charset="-122"/>
                 <a:cs typeface="Courier New" pitchFamily="34" charset="-120"/>
               </a:rPr>
-              <a:t>projection</a:t>
+              <a:t>contract</a:t>
             </a:r>
             <a:r>
               <a:rPr lang="en-US" sz="900" dirty="0">
@@ -12737,95 +12792,7 @@
                 <a:ea typeface="Courier New" pitchFamily="34" charset="-122"/>
                 <a:cs typeface="Courier New" pitchFamily="34" charset="-120"/>
               </a:rPr>
-              <a:t>on</a:t>
-            </a:r>
-            <a:r>
-              <a:rPr lang="en-US" sz="900" dirty="0">
-                <a:solidFill>
-                  <a:srgbClr val="CCCCCC"/>
-                </a:solidFill>
-                <a:latin typeface="Courier New" pitchFamily="34" charset="0"/>
-                <a:ea typeface="Courier New" pitchFamily="34" charset="-122"/>
-                <a:cs typeface="Courier New" pitchFamily="34" charset="-120"/>
-              </a:rPr>
-              <a:t> </a:t>
-            </a:r>
-            <a:r>
-              <a:rPr lang="en-US" sz="900" dirty="0">
-                <a:solidFill>
-                  <a:srgbClr val="CCCCCC"/>
-                </a:solidFill>
-                <a:latin typeface="Courier New" pitchFamily="34" charset="0"/>
-                <a:ea typeface="Courier New" pitchFamily="34" charset="-122"/>
-                <a:cs typeface="Courier New" pitchFamily="34" charset="-120"/>
-              </a:rPr>
-              <a:t>ZI_FE_TRAVEL_</a:t>
-            </a:r>
-            <a:r>
-              <a:rPr lang="en-US" sz="900" dirty="0">
-                <a:solidFill>
-                  <a:srgbClr val="CCCCCC"/>
-                </a:solidFill>
-                <a:latin typeface="Courier New" pitchFamily="34" charset="0"/>
-                <a:ea typeface="Courier New" pitchFamily="34" charset="-122"/>
-                <a:cs typeface="Courier New" pitchFamily="34" charset="-120"/>
-              </a:rPr>
-              <a:t>#</a:t>
-            </a:r>
-            <a:r>
-              <a:rPr lang="en-US" sz="900" dirty="0">
-                <a:solidFill>
-                  <a:srgbClr val="CCCCCC"/>
-                </a:solidFill>
-                <a:latin typeface="Courier New" pitchFamily="34" charset="0"/>
-                <a:ea typeface="Courier New" pitchFamily="34" charset="-122"/>
-                <a:cs typeface="Courier New" pitchFamily="34" charset="-120"/>
-              </a:rPr>
-              <a:t>#</a:t>
-            </a:r>
-            <a:r>
-              <a:rPr lang="en-US" sz="900" dirty="0">
-                <a:solidFill>
-                  <a:srgbClr val="CCCCCC"/>
-                </a:solidFill>
-                <a:latin typeface="Courier New" pitchFamily="34" charset="0"/>
-                <a:ea typeface="Courier New" pitchFamily="34" charset="-122"/>
-                <a:cs typeface="Courier New" pitchFamily="34" charset="-120"/>
-              </a:rPr>
-              <a:t>#</a:t>
-            </a:r>
-            <a:r>
-              <a:rPr lang="en-US" sz="900" dirty="0">
-                <a:solidFill>
-                  <a:srgbClr val="CCCCCC"/>
-                </a:solidFill>
-                <a:latin typeface="Courier New" pitchFamily="34" charset="0"/>
-                <a:ea typeface="Courier New" pitchFamily="34" charset="-122"/>
-                <a:cs typeface="Courier New" pitchFamily="34" charset="-120"/>
-              </a:rPr>
-              <a:t>#</a:t>
-            </a:r>
-            <a:r>
-              <a:rPr lang="en-US" sz="900" dirty="0">
-                <a:solidFill>
-                  <a:srgbClr val="CCCCCC"/>
-                </a:solidFill>
-                <a:latin typeface="Courier New" pitchFamily="34" charset="0"/>
-                <a:ea typeface="Courier New" pitchFamily="34" charset="-122"/>
-                <a:cs typeface="Courier New" pitchFamily="34" charset="-120"/>
-              </a:rPr>
-              <a:t>#</a:t>
-            </a:r>
-            <a:r>
-              <a:rPr lang="en-US" sz="900" dirty="0">
-                <a:solidFill>
-                  <a:srgbClr val="CCCCCC"/>
-                </a:solidFill>
-                <a:latin typeface="Courier New" pitchFamily="34" charset="0"/>
-                <a:ea typeface="Courier New" pitchFamily="34" charset="-122"/>
-                <a:cs typeface="Courier New" pitchFamily="34" charset="-120"/>
-              </a:rPr>
-              <a:t>#</a:t>
+              <a:t>transactional_query</a:t>
             </a:r>
             <a:endParaRPr lang="en-US" sz="900" dirty="0"/>
           </a:p>
@@ -12845,7 +12812,84 @@
                 <a:ea typeface="Courier New" pitchFamily="34" charset="-122"/>
                 <a:cs typeface="Courier New" pitchFamily="34" charset="-120"/>
               </a:rPr>
-              <a:t>{</a:t>
+              <a:t>  </a:t>
+            </a:r>
+            <a:r>
+              <a:rPr lang="en-US" sz="900" dirty="0">
+                <a:solidFill>
+                  <a:srgbClr val="CCCCCC"/>
+                </a:solidFill>
+                <a:latin typeface="Courier New" pitchFamily="34" charset="0"/>
+                <a:ea typeface="Courier New" pitchFamily="34" charset="-122"/>
+                <a:cs typeface="Courier New" pitchFamily="34" charset="-120"/>
+              </a:rPr>
+              <a:t>as</a:t>
+            </a:r>
+            <a:r>
+              <a:rPr lang="en-US" sz="900" dirty="0">
+                <a:solidFill>
+                  <a:srgbClr val="CCCCCC"/>
+                </a:solidFill>
+                <a:latin typeface="Courier New" pitchFamily="34" charset="0"/>
+                <a:ea typeface="Courier New" pitchFamily="34" charset="-122"/>
+                <a:cs typeface="Courier New" pitchFamily="34" charset="-120"/>
+              </a:rPr>
+              <a:t> </a:t>
+            </a:r>
+            <a:r>
+              <a:rPr lang="en-US" sz="900" dirty="0">
+                <a:solidFill>
+                  <a:srgbClr val="CCCCCC"/>
+                </a:solidFill>
+                <a:latin typeface="Courier New" pitchFamily="34" charset="0"/>
+                <a:ea typeface="Courier New" pitchFamily="34" charset="-122"/>
+                <a:cs typeface="Courier New" pitchFamily="34" charset="-120"/>
+              </a:rPr>
+              <a:t>projection</a:t>
+            </a:r>
+            <a:r>
+              <a:rPr lang="en-US" sz="900" dirty="0">
+                <a:solidFill>
+                  <a:srgbClr val="CCCCCC"/>
+                </a:solidFill>
+                <a:latin typeface="Courier New" pitchFamily="34" charset="0"/>
+                <a:ea typeface="Courier New" pitchFamily="34" charset="-122"/>
+                <a:cs typeface="Courier New" pitchFamily="34" charset="-120"/>
+              </a:rPr>
+              <a:t> </a:t>
+            </a:r>
+            <a:r>
+              <a:rPr lang="en-US" sz="900" dirty="0">
+                <a:solidFill>
+                  <a:srgbClr val="CCCCCC"/>
+                </a:solidFill>
+                <a:latin typeface="Courier New" pitchFamily="34" charset="0"/>
+                <a:ea typeface="Courier New" pitchFamily="34" charset="-122"/>
+                <a:cs typeface="Courier New" pitchFamily="34" charset="-120"/>
+              </a:rPr>
+              <a:t>on</a:t>
+            </a:r>
+            <a:r>
+              <a:rPr lang="en-US" sz="900" dirty="0">
+                <a:solidFill>
+                  <a:srgbClr val="CCCCCC"/>
+                </a:solidFill>
+                <a:latin typeface="Courier New" pitchFamily="34" charset="0"/>
+                <a:ea typeface="Courier New" pitchFamily="34" charset="-122"/>
+                <a:cs typeface="Courier New" pitchFamily="34" charset="-120"/>
+              </a:rPr>
+              <a:t> </a:t>
+            </a:r>
+            <a:r>
+              <a:rPr lang="en-US" sz="900" dirty="0">
+                <a:solidFill>
+                  <a:srgbClr val="CCCCCC"/>
+                </a:solidFill>
+                <a:latin typeface="Courier New" pitchFamily="34" charset="0"/>
+                <a:ea typeface="Courier New" pitchFamily="34" charset="-122"/>
+                <a:cs typeface="Courier New" pitchFamily="34" charset="-120"/>
+              </a:rPr>
+              <a:t>ZR_PC_PEDIDO</a:t>
             </a:r>
             <a:endParaRPr lang="en-US" sz="900" dirty="0"/>
           </a:p>
@@ -12865,51 +12909,7 @@
                 <a:ea typeface="Courier New" pitchFamily="34" charset="-122"/>
                 <a:cs typeface="Courier New" pitchFamily="34" charset="-120"/>
               </a:rPr>
-              <a:t>  </a:t>
-            </a:r>
-            <a:r>
-              <a:rPr lang="en-US" sz="900" dirty="0">
-                <a:solidFill>
-                  <a:srgbClr val="CCCCCC"/>
-                </a:solidFill>
-                <a:latin typeface="Courier New" pitchFamily="34" charset="0"/>
-                <a:ea typeface="Courier New" pitchFamily="34" charset="-122"/>
-                <a:cs typeface="Courier New" pitchFamily="34" charset="-120"/>
-              </a:rPr>
-              <a:t>key</a:t>
-            </a:r>
-            <a:r>
-              <a:rPr lang="en-US" sz="900" dirty="0">
-                <a:solidFill>
-                  <a:srgbClr val="CCCCCC"/>
-                </a:solidFill>
-                <a:latin typeface="Courier New" pitchFamily="34" charset="0"/>
-                <a:ea typeface="Courier New" pitchFamily="34" charset="-122"/>
-                <a:cs typeface="Courier New" pitchFamily="34" charset="-120"/>
-              </a:rPr>
-              <a:t> </a:t>
-            </a:r>
-            <a:r>
-              <a:rPr lang="en-US" sz="900" dirty="0">
-                <a:solidFill>
-                  <a:srgbClr val="CCCCCC"/>
-                </a:solidFill>
-                <a:latin typeface="Courier New" pitchFamily="34" charset="0"/>
-                <a:ea typeface="Courier New" pitchFamily="34" charset="-122"/>
-                <a:cs typeface="Courier New" pitchFamily="34" charset="-120"/>
-              </a:rPr>
-              <a:t>TravelUUID</a:t>
-            </a:r>
-            <a:r>
-              <a:rPr lang="en-US" sz="900" dirty="0">
-                <a:solidFill>
-                  <a:srgbClr val="CCCCCC"/>
-                </a:solidFill>
-                <a:latin typeface="Courier New" pitchFamily="34" charset="0"/>
-                <a:ea typeface="Courier New" pitchFamily="34" charset="-122"/>
-                <a:cs typeface="Courier New" pitchFamily="34" charset="-120"/>
-              </a:rPr>
-              <a:t>,</a:t>
+              <a:t>{</a:t>
             </a:r>
             <a:endParaRPr lang="en-US" sz="900" dirty="0"/>
           </a:p>
@@ -12929,62 +12929,18 @@
                 <a:ea typeface="Courier New" pitchFamily="34" charset="-122"/>
                 <a:cs typeface="Courier New" pitchFamily="34" charset="-120"/>
               </a:rPr>
-              <a:t>      </a:t>
-            </a:r>
-            <a:r>
-              <a:rPr lang="en-US" sz="900" dirty="0">
-                <a:solidFill>
-                  <a:srgbClr val="CCCCCC"/>
-                </a:solidFill>
-                <a:latin typeface="Courier New" pitchFamily="34" charset="0"/>
-                <a:ea typeface="Courier New" pitchFamily="34" charset="-122"/>
-                <a:cs typeface="Courier New" pitchFamily="34" charset="-120"/>
-              </a:rPr>
-              <a:t>@</a:t>
-            </a:r>
-            <a:r>
-              <a:rPr lang="en-US" sz="900" dirty="0">
-                <a:solidFill>
-                  <a:srgbClr val="CCCCCC"/>
-                </a:solidFill>
-                <a:latin typeface="Courier New" pitchFamily="34" charset="0"/>
-                <a:ea typeface="Courier New" pitchFamily="34" charset="-122"/>
-                <a:cs typeface="Courier New" pitchFamily="34" charset="-120"/>
-              </a:rPr>
-              <a:t>Search</a:t>
-            </a:r>
-            <a:r>
-              <a:rPr lang="en-US" sz="900" dirty="0">
-                <a:solidFill>
-                  <a:srgbClr val="CCCCCC"/>
-                </a:solidFill>
-                <a:latin typeface="Courier New" pitchFamily="34" charset="0"/>
-                <a:ea typeface="Courier New" pitchFamily="34" charset="-122"/>
-                <a:cs typeface="Courier New" pitchFamily="34" charset="-120"/>
-              </a:rPr>
-              <a:t>.</a:t>
-            </a:r>
-            <a:r>
-              <a:rPr lang="en-US" sz="900" dirty="0">
-                <a:solidFill>
-                  <a:srgbClr val="CCCCCC"/>
-                </a:solidFill>
-                <a:latin typeface="Courier New" pitchFamily="34" charset="0"/>
-                <a:ea typeface="Courier New" pitchFamily="34" charset="-122"/>
-                <a:cs typeface="Courier New" pitchFamily="34" charset="-120"/>
-              </a:rPr>
-              <a:t>defaultSearchElement</a:t>
-            </a:r>
-            <a:r>
-              <a:rPr lang="en-US" sz="900" dirty="0">
-                <a:solidFill>
-                  <a:srgbClr val="CCCCCC"/>
-                </a:solidFill>
-                <a:latin typeface="Courier New" pitchFamily="34" charset="0"/>
-                <a:ea typeface="Courier New" pitchFamily="34" charset="-122"/>
-                <a:cs typeface="Courier New" pitchFamily="34" charset="-120"/>
-              </a:rPr>
-              <a:t>:</a:t>
+              <a:t>  </a:t>
+            </a:r>
+            <a:r>
+              <a:rPr lang="en-US" sz="900" dirty="0">
+                <a:solidFill>
+                  <a:srgbClr val="CCCCCC"/>
+                </a:solidFill>
+                <a:latin typeface="Courier New" pitchFamily="34" charset="0"/>
+                <a:ea typeface="Courier New" pitchFamily="34" charset="-122"/>
+                <a:cs typeface="Courier New" pitchFamily="34" charset="-120"/>
+              </a:rPr>
+              <a:t>key</a:t>
             </a:r>
             <a:r>
               <a:rPr lang="en-US" sz="900" dirty="0">
@@ -13006,7 +12962,18 @@
                 <a:ea typeface="Courier New" pitchFamily="34" charset="-122"/>
                 <a:cs typeface="Courier New" pitchFamily="34" charset="-120"/>
               </a:rPr>
-              <a:t>true</a:t>
+              <a:t>PedidoUUID</a:t>
+            </a:r>
+            <a:r>
+              <a:rPr lang="en-US" sz="900" dirty="0">
+                <a:solidFill>
+                  <a:srgbClr val="CCCCCC"/>
+                </a:solidFill>
+                <a:latin typeface="Courier New" pitchFamily="34" charset="0"/>
+                <a:ea typeface="Courier New" pitchFamily="34" charset="-122"/>
+                <a:cs typeface="Courier New" pitchFamily="34" charset="-120"/>
+              </a:rPr>
+              <a:t>,</a:t>
             </a:r>
             <a:endParaRPr lang="en-US" sz="900" dirty="0"/>
           </a:p>
@@ -13037,18 +13004,73 @@
                 <a:ea typeface="Courier New" pitchFamily="34" charset="-122"/>
                 <a:cs typeface="Courier New" pitchFamily="34" charset="-120"/>
               </a:rPr>
-              <a:t>TravelID</a:t>
-            </a:r>
-            <a:r>
-              <a:rPr lang="en-US" sz="900" dirty="0">
-                <a:solidFill>
-                  <a:srgbClr val="CCCCCC"/>
-                </a:solidFill>
-                <a:latin typeface="Courier New" pitchFamily="34" charset="0"/>
-                <a:ea typeface="Courier New" pitchFamily="34" charset="-122"/>
-                <a:cs typeface="Courier New" pitchFamily="34" charset="-120"/>
-              </a:rPr>
-              <a:t>,</a:t>
+              <a:t>@</a:t>
+            </a:r>
+            <a:r>
+              <a:rPr lang="en-US" sz="900" dirty="0">
+                <a:solidFill>
+                  <a:srgbClr val="CCCCCC"/>
+                </a:solidFill>
+                <a:latin typeface="Courier New" pitchFamily="34" charset="0"/>
+                <a:ea typeface="Courier New" pitchFamily="34" charset="-122"/>
+                <a:cs typeface="Courier New" pitchFamily="34" charset="-120"/>
+              </a:rPr>
+              <a:t>Search</a:t>
+            </a:r>
+            <a:r>
+              <a:rPr lang="en-US" sz="900" dirty="0">
+                <a:solidFill>
+                  <a:srgbClr val="CCCCCC"/>
+                </a:solidFill>
+                <a:latin typeface="Courier New" pitchFamily="34" charset="0"/>
+                <a:ea typeface="Courier New" pitchFamily="34" charset="-122"/>
+                <a:cs typeface="Courier New" pitchFamily="34" charset="-120"/>
+              </a:rPr>
+              <a:t>.</a:t>
+            </a:r>
+            <a:r>
+              <a:rPr lang="en-US" sz="900" dirty="0">
+                <a:solidFill>
+                  <a:srgbClr val="CCCCCC"/>
+                </a:solidFill>
+                <a:latin typeface="Courier New" pitchFamily="34" charset="0"/>
+                <a:ea typeface="Courier New" pitchFamily="34" charset="-122"/>
+                <a:cs typeface="Courier New" pitchFamily="34" charset="-120"/>
+              </a:rPr>
+              <a:t>defaultSearchElement</a:t>
+            </a:r>
+            <a:r>
+              <a:rPr lang="en-US" sz="900" dirty="0">
+                <a:solidFill>
+                  <a:srgbClr val="CCCCCC"/>
+                </a:solidFill>
+                <a:latin typeface="Courier New" pitchFamily="34" charset="0"/>
+                <a:ea typeface="Courier New" pitchFamily="34" charset="-122"/>
+                <a:cs typeface="Courier New" pitchFamily="34" charset="-120"/>
+              </a:rPr>
+              <a:t>:</a:t>
+            </a:r>
+            <a:r>
+              <a:rPr lang="en-US" sz="900" dirty="0">
+                <a:solidFill>
+                  <a:srgbClr val="CCCCCC"/>
+                </a:solidFill>
+                <a:latin typeface="Courier New" pitchFamily="34" charset="0"/>
+                <a:ea typeface="Courier New" pitchFamily="34" charset="-122"/>
+                <a:cs typeface="Courier New" pitchFamily="34" charset="-120"/>
+              </a:rPr>
+              <a:t> </a:t>
+            </a:r>
+            <a:r>
+              <a:rPr lang="en-US" sz="900" dirty="0">
+                <a:solidFill>
+                  <a:srgbClr val="CCCCCC"/>
+                </a:solidFill>
+                <a:latin typeface="Courier New" pitchFamily="34" charset="0"/>
+                <a:ea typeface="Courier New" pitchFamily="34" charset="-122"/>
+                <a:cs typeface="Courier New" pitchFamily="34" charset="-120"/>
+              </a:rPr>
+              <a:t>true</a:t>
             </a:r>
             <a:endParaRPr lang="en-US" sz="900" dirty="0"/>
           </a:p>
@@ -13079,7 +13101,7 @@
                 <a:ea typeface="Courier New" pitchFamily="34" charset="-122"/>
                 <a:cs typeface="Courier New" pitchFamily="34" charset="-120"/>
               </a:rPr>
-              <a:t>AgencyID</a:t>
+              <a:t>NumeroPedido</a:t>
             </a:r>
             <a:r>
               <a:rPr lang="en-US" sz="900" dirty="0">
@@ -13121,18 +13143,139 @@
                 <a:ea typeface="Courier New" pitchFamily="34" charset="-122"/>
                 <a:cs typeface="Courier New" pitchFamily="34" charset="-120"/>
               </a:rPr>
-              <a:t>CustomerID</a:t>
-            </a:r>
-            <a:r>
-              <a:rPr lang="en-US" sz="900" dirty="0">
-                <a:solidFill>
-                  <a:srgbClr val="CCCCCC"/>
-                </a:solidFill>
-                <a:latin typeface="Courier New" pitchFamily="34" charset="0"/>
-                <a:ea typeface="Courier New" pitchFamily="34" charset="-122"/>
-                <a:cs typeface="Courier New" pitchFamily="34" charset="-120"/>
-              </a:rPr>
-              <a:t>,</a:t>
+              <a:t>@</a:t>
+            </a:r>
+            <a:r>
+              <a:rPr lang="en-US" sz="900" dirty="0">
+                <a:solidFill>
+                  <a:srgbClr val="CCCCCC"/>
+                </a:solidFill>
+                <a:latin typeface="Courier New" pitchFamily="34" charset="0"/>
+                <a:ea typeface="Courier New" pitchFamily="34" charset="-122"/>
+                <a:cs typeface="Courier New" pitchFamily="34" charset="-120"/>
+              </a:rPr>
+              <a:t>ObjectModel</a:t>
+            </a:r>
+            <a:r>
+              <a:rPr lang="en-US" sz="900" dirty="0">
+                <a:solidFill>
+                  <a:srgbClr val="CCCCCC"/>
+                </a:solidFill>
+                <a:latin typeface="Courier New" pitchFamily="34" charset="0"/>
+                <a:ea typeface="Courier New" pitchFamily="34" charset="-122"/>
+                <a:cs typeface="Courier New" pitchFamily="34" charset="-120"/>
+              </a:rPr>
+              <a:t>.</a:t>
+            </a:r>
+            <a:r>
+              <a:rPr lang="en-US" sz="900" dirty="0">
+                <a:solidFill>
+                  <a:srgbClr val="CCCCCC"/>
+                </a:solidFill>
+                <a:latin typeface="Courier New" pitchFamily="34" charset="0"/>
+                <a:ea typeface="Courier New" pitchFamily="34" charset="-122"/>
+                <a:cs typeface="Courier New" pitchFamily="34" charset="-120"/>
+              </a:rPr>
+              <a:t>text</a:t>
+            </a:r>
+            <a:r>
+              <a:rPr lang="en-US" sz="900" dirty="0">
+                <a:solidFill>
+                  <a:srgbClr val="CCCCCC"/>
+                </a:solidFill>
+                <a:latin typeface="Courier New" pitchFamily="34" charset="0"/>
+                <a:ea typeface="Courier New" pitchFamily="34" charset="-122"/>
+                <a:cs typeface="Courier New" pitchFamily="34" charset="-120"/>
+              </a:rPr>
+              <a:t>.</a:t>
+            </a:r>
+            <a:r>
+              <a:rPr lang="en-US" sz="900" dirty="0">
+                <a:solidFill>
+                  <a:srgbClr val="CCCCCC"/>
+                </a:solidFill>
+                <a:latin typeface="Courier New" pitchFamily="34" charset="0"/>
+                <a:ea typeface="Courier New" pitchFamily="34" charset="-122"/>
+                <a:cs typeface="Courier New" pitchFamily="34" charset="-120"/>
+              </a:rPr>
+              <a:t>element</a:t>
+            </a:r>
+            <a:r>
+              <a:rPr lang="en-US" sz="900" dirty="0">
+                <a:solidFill>
+                  <a:srgbClr val="CCCCCC"/>
+                </a:solidFill>
+                <a:latin typeface="Courier New" pitchFamily="34" charset="0"/>
+                <a:ea typeface="Courier New" pitchFamily="34" charset="-122"/>
+                <a:cs typeface="Courier New" pitchFamily="34" charset="-120"/>
+              </a:rPr>
+              <a:t>:</a:t>
+            </a:r>
+            <a:r>
+              <a:rPr lang="en-US" sz="900" dirty="0">
+                <a:solidFill>
+                  <a:srgbClr val="CCCCCC"/>
+                </a:solidFill>
+                <a:latin typeface="Courier New" pitchFamily="34" charset="0"/>
+                <a:ea typeface="Courier New" pitchFamily="34" charset="-122"/>
+                <a:cs typeface="Courier New" pitchFamily="34" charset="-120"/>
+              </a:rPr>
+              <a:t> </a:t>
+            </a:r>
+            <a:r>
+              <a:rPr lang="en-US" sz="900" dirty="0">
+                <a:solidFill>
+                  <a:srgbClr val="CCCCCC"/>
+                </a:solidFill>
+                <a:latin typeface="Courier New" pitchFamily="34" charset="0"/>
+                <a:ea typeface="Courier New" pitchFamily="34" charset="-122"/>
+                <a:cs typeface="Courier New" pitchFamily="34" charset="-120"/>
+              </a:rPr>
+              <a:t>[</a:t>
+            </a:r>
+            <a:r>
+              <a:rPr lang="en-US" sz="900" dirty="0">
+                <a:solidFill>
+                  <a:srgbClr val="CCCCCC"/>
+                </a:solidFill>
+                <a:latin typeface="Courier New" pitchFamily="34" charset="0"/>
+                <a:ea typeface="Courier New" pitchFamily="34" charset="-122"/>
+                <a:cs typeface="Courier New" pitchFamily="34" charset="-120"/>
+              </a:rPr>
+              <a:t> </a:t>
+            </a:r>
+            <a:r>
+              <a:rPr lang="en-US" sz="900" dirty="0">
+                <a:solidFill>
+                  <a:srgbClr val="CE9178"/>
+                </a:solidFill>
+                <a:latin typeface="Courier New" pitchFamily="34" charset="0"/>
+                <a:ea typeface="Courier New" pitchFamily="34" charset="-122"/>
+                <a:cs typeface="Courier New" pitchFamily="34" charset="-120"/>
+              </a:rPr>
+              <a:t>'NomeCliente'</a:t>
+            </a:r>
+            <a:r>
+              <a:rPr lang="en-US" sz="900" dirty="0">
+                <a:solidFill>
+                  <a:srgbClr val="CCCCCC"/>
+                </a:solidFill>
+                <a:latin typeface="Courier New" pitchFamily="34" charset="0"/>
+                <a:ea typeface="Courier New" pitchFamily="34" charset="-122"/>
+                <a:cs typeface="Courier New" pitchFamily="34" charset="-120"/>
+              </a:rPr>
+              <a:t> </a:t>
+            </a:r>
+            <a:r>
+              <a:rPr lang="en-US" sz="900" dirty="0">
+                <a:solidFill>
+                  <a:srgbClr val="CCCCCC"/>
+                </a:solidFill>
+                <a:latin typeface="Courier New" pitchFamily="34" charset="0"/>
+                <a:ea typeface="Courier New" pitchFamily="34" charset="-122"/>
+                <a:cs typeface="Courier New" pitchFamily="34" charset="-120"/>
+              </a:rPr>
+              <a:t>]</a:t>
             </a:r>
             <a:endParaRPr lang="en-US" sz="900" dirty="0"/>
           </a:p>
@@ -13163,7 +13306,7 @@
                 <a:ea typeface="Courier New" pitchFamily="34" charset="-122"/>
                 <a:cs typeface="Courier New" pitchFamily="34" charset="-120"/>
               </a:rPr>
-              <a:t>BeginDate</a:t>
+              <a:t>ClienteUUID</a:t>
             </a:r>
             <a:r>
               <a:rPr lang="en-US" sz="900" dirty="0">
@@ -13205,7 +13348,73 @@
                 <a:ea typeface="Courier New" pitchFamily="34" charset="-122"/>
                 <a:cs typeface="Courier New" pitchFamily="34" charset="-120"/>
               </a:rPr>
-              <a:t>EndDate</a:t>
+              <a:t>_Cliente</a:t>
+            </a:r>
+            <a:r>
+              <a:rPr lang="en-US" sz="900" dirty="0">
+                <a:solidFill>
+                  <a:srgbClr val="CCCCCC"/>
+                </a:solidFill>
+                <a:latin typeface="Courier New" pitchFamily="34" charset="0"/>
+                <a:ea typeface="Courier New" pitchFamily="34" charset="-122"/>
+                <a:cs typeface="Courier New" pitchFamily="34" charset="-120"/>
+              </a:rPr>
+              <a:t>.</a:t>
+            </a:r>
+            <a:r>
+              <a:rPr lang="en-US" sz="900" dirty="0">
+                <a:solidFill>
+                  <a:srgbClr val="CCCCCC"/>
+                </a:solidFill>
+                <a:latin typeface="Courier New" pitchFamily="34" charset="0"/>
+                <a:ea typeface="Courier New" pitchFamily="34" charset="-122"/>
+                <a:cs typeface="Courier New" pitchFamily="34" charset="-120"/>
+              </a:rPr>
+              <a:t>Nome</a:t>
+            </a:r>
+            <a:r>
+              <a:rPr lang="en-US" sz="900" dirty="0">
+                <a:solidFill>
+                  <a:srgbClr val="CCCCCC"/>
+                </a:solidFill>
+                <a:latin typeface="Courier New" pitchFamily="34" charset="0"/>
+                <a:ea typeface="Courier New" pitchFamily="34" charset="-122"/>
+                <a:cs typeface="Courier New" pitchFamily="34" charset="-120"/>
+              </a:rPr>
+              <a:t>                </a:t>
+            </a:r>
+            <a:r>
+              <a:rPr lang="en-US" sz="900" dirty="0">
+                <a:solidFill>
+                  <a:srgbClr val="CCCCCC"/>
+                </a:solidFill>
+                <a:latin typeface="Courier New" pitchFamily="34" charset="0"/>
+                <a:ea typeface="Courier New" pitchFamily="34" charset="-122"/>
+                <a:cs typeface="Courier New" pitchFamily="34" charset="-120"/>
+              </a:rPr>
+              <a:t>as</a:t>
+            </a:r>
+            <a:r>
+              <a:rPr lang="en-US" sz="900" dirty="0">
+                <a:solidFill>
+                  <a:srgbClr val="CCCCCC"/>
+                </a:solidFill>
+                <a:latin typeface="Courier New" pitchFamily="34" charset="0"/>
+                <a:ea typeface="Courier New" pitchFamily="34" charset="-122"/>
+                <a:cs typeface="Courier New" pitchFamily="34" charset="-120"/>
+              </a:rPr>
+              <a:t> </a:t>
+            </a:r>
+            <a:r>
+              <a:rPr lang="en-US" sz="900" dirty="0">
+                <a:solidFill>
+                  <a:srgbClr val="CCCCCC"/>
+                </a:solidFill>
+                <a:latin typeface="Courier New" pitchFamily="34" charset="0"/>
+                <a:ea typeface="Courier New" pitchFamily="34" charset="-122"/>
+                <a:cs typeface="Courier New" pitchFamily="34" charset="-120"/>
+              </a:rPr>
+              <a:t>NomeCliente</a:t>
             </a:r>
             <a:r>
               <a:rPr lang="en-US" sz="900" dirty="0">
@@ -13247,18 +13456,139 @@
                 <a:ea typeface="Courier New" pitchFamily="34" charset="-122"/>
                 <a:cs typeface="Courier New" pitchFamily="34" charset="-120"/>
               </a:rPr>
-              <a:t>BookingFee</a:t>
-            </a:r>
-            <a:r>
-              <a:rPr lang="en-US" sz="900" dirty="0">
-                <a:solidFill>
-                  <a:srgbClr val="CCCCCC"/>
-                </a:solidFill>
-                <a:latin typeface="Courier New" pitchFamily="34" charset="0"/>
-                <a:ea typeface="Courier New" pitchFamily="34" charset="-122"/>
-                <a:cs typeface="Courier New" pitchFamily="34" charset="-120"/>
-              </a:rPr>
-              <a:t>,</a:t>
+              <a:t>@</a:t>
+            </a:r>
+            <a:r>
+              <a:rPr lang="en-US" sz="900" dirty="0">
+                <a:solidFill>
+                  <a:srgbClr val="CCCCCC"/>
+                </a:solidFill>
+                <a:latin typeface="Courier New" pitchFamily="34" charset="0"/>
+                <a:ea typeface="Courier New" pitchFamily="34" charset="-122"/>
+                <a:cs typeface="Courier New" pitchFamily="34" charset="-120"/>
+              </a:rPr>
+              <a:t>ObjectModel</a:t>
+            </a:r>
+            <a:r>
+              <a:rPr lang="en-US" sz="900" dirty="0">
+                <a:solidFill>
+                  <a:srgbClr val="CCCCCC"/>
+                </a:solidFill>
+                <a:latin typeface="Courier New" pitchFamily="34" charset="0"/>
+                <a:ea typeface="Courier New" pitchFamily="34" charset="-122"/>
+                <a:cs typeface="Courier New" pitchFamily="34" charset="-120"/>
+              </a:rPr>
+              <a:t>.</a:t>
+            </a:r>
+            <a:r>
+              <a:rPr lang="en-US" sz="900" dirty="0">
+                <a:solidFill>
+                  <a:srgbClr val="CCCCCC"/>
+                </a:solidFill>
+                <a:latin typeface="Courier New" pitchFamily="34" charset="0"/>
+                <a:ea typeface="Courier New" pitchFamily="34" charset="-122"/>
+                <a:cs typeface="Courier New" pitchFamily="34" charset="-120"/>
+              </a:rPr>
+              <a:t>text</a:t>
+            </a:r>
+            <a:r>
+              <a:rPr lang="en-US" sz="900" dirty="0">
+                <a:solidFill>
+                  <a:srgbClr val="CCCCCC"/>
+                </a:solidFill>
+                <a:latin typeface="Courier New" pitchFamily="34" charset="0"/>
+                <a:ea typeface="Courier New" pitchFamily="34" charset="-122"/>
+                <a:cs typeface="Courier New" pitchFamily="34" charset="-120"/>
+              </a:rPr>
+              <a:t>.</a:t>
+            </a:r>
+            <a:r>
+              <a:rPr lang="en-US" sz="900" dirty="0">
+                <a:solidFill>
+                  <a:srgbClr val="CCCCCC"/>
+                </a:solidFill>
+                <a:latin typeface="Courier New" pitchFamily="34" charset="0"/>
+                <a:ea typeface="Courier New" pitchFamily="34" charset="-122"/>
+                <a:cs typeface="Courier New" pitchFamily="34" charset="-120"/>
+              </a:rPr>
+              <a:t>element</a:t>
+            </a:r>
+            <a:r>
+              <a:rPr lang="en-US" sz="900" dirty="0">
+                <a:solidFill>
+                  <a:srgbClr val="CCCCCC"/>
+                </a:solidFill>
+                <a:latin typeface="Courier New" pitchFamily="34" charset="0"/>
+                <a:ea typeface="Courier New" pitchFamily="34" charset="-122"/>
+                <a:cs typeface="Courier New" pitchFamily="34" charset="-120"/>
+              </a:rPr>
+              <a:t>:</a:t>
+            </a:r>
+            <a:r>
+              <a:rPr lang="en-US" sz="900" dirty="0">
+                <a:solidFill>
+                  <a:srgbClr val="CCCCCC"/>
+                </a:solidFill>
+                <a:latin typeface="Courier New" pitchFamily="34" charset="0"/>
+                <a:ea typeface="Courier New" pitchFamily="34" charset="-122"/>
+                <a:cs typeface="Courier New" pitchFamily="34" charset="-120"/>
+              </a:rPr>
+              <a:t> </a:t>
+            </a:r>
+            <a:r>
+              <a:rPr lang="en-US" sz="900" dirty="0">
+                <a:solidFill>
+                  <a:srgbClr val="CCCCCC"/>
+                </a:solidFill>
+                <a:latin typeface="Courier New" pitchFamily="34" charset="0"/>
+                <a:ea typeface="Courier New" pitchFamily="34" charset="-122"/>
+                <a:cs typeface="Courier New" pitchFamily="34" charset="-120"/>
+              </a:rPr>
+              <a:t>[</a:t>
+            </a:r>
+            <a:r>
+              <a:rPr lang="en-US" sz="900" dirty="0">
+                <a:solidFill>
+                  <a:srgbClr val="CCCCCC"/>
+                </a:solidFill>
+                <a:latin typeface="Courier New" pitchFamily="34" charset="0"/>
+                <a:ea typeface="Courier New" pitchFamily="34" charset="-122"/>
+                <a:cs typeface="Courier New" pitchFamily="34" charset="-120"/>
+              </a:rPr>
+              <a:t> </a:t>
+            </a:r>
+            <a:r>
+              <a:rPr lang="en-US" sz="900" dirty="0">
+                <a:solidFill>
+                  <a:srgbClr val="CE9178"/>
+                </a:solidFill>
+                <a:latin typeface="Courier New" pitchFamily="34" charset="0"/>
+                <a:ea typeface="Courier New" pitchFamily="34" charset="-122"/>
+                <a:cs typeface="Courier New" pitchFamily="34" charset="-120"/>
+              </a:rPr>
+              <a:t>'StatusPedidoTexto'</a:t>
+            </a:r>
+            <a:r>
+              <a:rPr lang="en-US" sz="900" dirty="0">
+                <a:solidFill>
+                  <a:srgbClr val="CCCCCC"/>
+                </a:solidFill>
+                <a:latin typeface="Courier New" pitchFamily="34" charset="0"/>
+                <a:ea typeface="Courier New" pitchFamily="34" charset="-122"/>
+                <a:cs typeface="Courier New" pitchFamily="34" charset="-120"/>
+              </a:rPr>
+              <a:t> </a:t>
+            </a:r>
+            <a:r>
+              <a:rPr lang="en-US" sz="900" dirty="0">
+                <a:solidFill>
+                  <a:srgbClr val="CCCCCC"/>
+                </a:solidFill>
+                <a:latin typeface="Courier New" pitchFamily="34" charset="0"/>
+                <a:ea typeface="Courier New" pitchFamily="34" charset="-122"/>
+                <a:cs typeface="Courier New" pitchFamily="34" charset="-120"/>
+              </a:rPr>
+              <a:t>]</a:t>
             </a:r>
             <a:endParaRPr lang="en-US" sz="900" dirty="0"/>
           </a:p>
@@ -13289,18 +13619,84 @@
                 <a:ea typeface="Courier New" pitchFamily="34" charset="-122"/>
                 <a:cs typeface="Courier New" pitchFamily="34" charset="-120"/>
               </a:rPr>
-              <a:t>TotalPrice</a:t>
-            </a:r>
-            <a:r>
-              <a:rPr lang="en-US" sz="900" dirty="0">
-                <a:solidFill>
-                  <a:srgbClr val="CCCCCC"/>
-                </a:solidFill>
-                <a:latin typeface="Courier New" pitchFamily="34" charset="0"/>
-                <a:ea typeface="Courier New" pitchFamily="34" charset="-122"/>
-                <a:cs typeface="Courier New" pitchFamily="34" charset="-120"/>
-              </a:rPr>
-              <a:t>,</a:t>
+              <a:t>@</a:t>
+            </a:r>
+            <a:r>
+              <a:rPr lang="en-US" sz="900" dirty="0">
+                <a:solidFill>
+                  <a:srgbClr val="CCCCCC"/>
+                </a:solidFill>
+                <a:latin typeface="Courier New" pitchFamily="34" charset="0"/>
+                <a:ea typeface="Courier New" pitchFamily="34" charset="-122"/>
+                <a:cs typeface="Courier New" pitchFamily="34" charset="-120"/>
+              </a:rPr>
+              <a:t>UI</a:t>
+            </a:r>
+            <a:r>
+              <a:rPr lang="en-US" sz="900" dirty="0">
+                <a:solidFill>
+                  <a:srgbClr val="CCCCCC"/>
+                </a:solidFill>
+                <a:latin typeface="Courier New" pitchFamily="34" charset="0"/>
+                <a:ea typeface="Courier New" pitchFamily="34" charset="-122"/>
+                <a:cs typeface="Courier New" pitchFamily="34" charset="-120"/>
+              </a:rPr>
+              <a:t>.</a:t>
+            </a:r>
+            <a:r>
+              <a:rPr lang="en-US" sz="900" dirty="0">
+                <a:solidFill>
+                  <a:srgbClr val="CCCCCC"/>
+                </a:solidFill>
+                <a:latin typeface="Courier New" pitchFamily="34" charset="0"/>
+                <a:ea typeface="Courier New" pitchFamily="34" charset="-122"/>
+                <a:cs typeface="Courier New" pitchFamily="34" charset="-120"/>
+              </a:rPr>
+              <a:t>textArrangement</a:t>
+            </a:r>
+            <a:r>
+              <a:rPr lang="en-US" sz="900" dirty="0">
+                <a:solidFill>
+                  <a:srgbClr val="CCCCCC"/>
+                </a:solidFill>
+                <a:latin typeface="Courier New" pitchFamily="34" charset="0"/>
+                <a:ea typeface="Courier New" pitchFamily="34" charset="-122"/>
+                <a:cs typeface="Courier New" pitchFamily="34" charset="-120"/>
+              </a:rPr>
+              <a:t>:</a:t>
+            </a:r>
+            <a:r>
+              <a:rPr lang="en-US" sz="900" dirty="0">
+                <a:solidFill>
+                  <a:srgbClr val="CCCCCC"/>
+                </a:solidFill>
+                <a:latin typeface="Courier New" pitchFamily="34" charset="0"/>
+                <a:ea typeface="Courier New" pitchFamily="34" charset="-122"/>
+                <a:cs typeface="Courier New" pitchFamily="34" charset="-120"/>
+              </a:rPr>
+              <a:t> </a:t>
+            </a:r>
+            <a:r>
+              <a:rPr lang="en-US" sz="900" dirty="0">
+                <a:solidFill>
+                  <a:srgbClr val="CCCCCC"/>
+                </a:solidFill>
+                <a:latin typeface="Courier New" pitchFamily="34" charset="0"/>
+                <a:ea typeface="Courier New" pitchFamily="34" charset="-122"/>
+                <a:cs typeface="Courier New" pitchFamily="34" charset="-120"/>
+              </a:rPr>
+              <a:t>#</a:t>
+            </a:r>
+            <a:r>
+              <a:rPr lang="en-US" sz="900" dirty="0">
+                <a:solidFill>
+                  <a:srgbClr val="CCCCCC"/>
+                </a:solidFill>
+                <a:latin typeface="Courier New" pitchFamily="34" charset="0"/>
+                <a:ea typeface="Courier New" pitchFamily="34" charset="-122"/>
+                <a:cs typeface="Courier New" pitchFamily="34" charset="-120"/>
+              </a:rPr>
+              <a:t>TEXT_ONLY</a:t>
             </a:r>
             <a:endParaRPr lang="en-US" sz="900" dirty="0"/>
           </a:p>
@@ -13331,117 +13727,18 @@
                 <a:ea typeface="Courier New" pitchFamily="34" charset="-122"/>
                 <a:cs typeface="Courier New" pitchFamily="34" charset="-120"/>
               </a:rPr>
-              <a:t>@</a:t>
-            </a:r>
-            <a:r>
-              <a:rPr lang="en-US" sz="900" dirty="0">
-                <a:solidFill>
-                  <a:srgbClr val="CCCCCC"/>
-                </a:solidFill>
-                <a:latin typeface="Courier New" pitchFamily="34" charset="0"/>
-                <a:ea typeface="Courier New" pitchFamily="34" charset="-122"/>
-                <a:cs typeface="Courier New" pitchFamily="34" charset="-120"/>
-              </a:rPr>
-              <a:t>ObjectModel</a:t>
-            </a:r>
-            <a:r>
-              <a:rPr lang="en-US" sz="900" dirty="0">
-                <a:solidFill>
-                  <a:srgbClr val="CCCCCC"/>
-                </a:solidFill>
-                <a:latin typeface="Courier New" pitchFamily="34" charset="0"/>
-                <a:ea typeface="Courier New" pitchFamily="34" charset="-122"/>
-                <a:cs typeface="Courier New" pitchFamily="34" charset="-120"/>
-              </a:rPr>
-              <a:t>.</a:t>
-            </a:r>
-            <a:r>
-              <a:rPr lang="en-US" sz="900" dirty="0">
-                <a:solidFill>
-                  <a:srgbClr val="CCCCCC"/>
-                </a:solidFill>
-                <a:latin typeface="Courier New" pitchFamily="34" charset="0"/>
-                <a:ea typeface="Courier New" pitchFamily="34" charset="-122"/>
-                <a:cs typeface="Courier New" pitchFamily="34" charset="-120"/>
-              </a:rPr>
-              <a:t>text</a:t>
-            </a:r>
-            <a:r>
-              <a:rPr lang="en-US" sz="900" dirty="0">
-                <a:solidFill>
-                  <a:srgbClr val="CCCCCC"/>
-                </a:solidFill>
-                <a:latin typeface="Courier New" pitchFamily="34" charset="0"/>
-                <a:ea typeface="Courier New" pitchFamily="34" charset="-122"/>
-                <a:cs typeface="Courier New" pitchFamily="34" charset="-120"/>
-              </a:rPr>
-              <a:t>.</a:t>
-            </a:r>
-            <a:r>
-              <a:rPr lang="en-US" sz="900" dirty="0">
-                <a:solidFill>
-                  <a:srgbClr val="CCCCCC"/>
-                </a:solidFill>
-                <a:latin typeface="Courier New" pitchFamily="34" charset="0"/>
-                <a:ea typeface="Courier New" pitchFamily="34" charset="-122"/>
-                <a:cs typeface="Courier New" pitchFamily="34" charset="-120"/>
-              </a:rPr>
-              <a:t>element</a:t>
-            </a:r>
-            <a:r>
-              <a:rPr lang="en-US" sz="900" dirty="0">
-                <a:solidFill>
-                  <a:srgbClr val="CCCCCC"/>
-                </a:solidFill>
-                <a:latin typeface="Courier New" pitchFamily="34" charset="0"/>
-                <a:ea typeface="Courier New" pitchFamily="34" charset="-122"/>
-                <a:cs typeface="Courier New" pitchFamily="34" charset="-120"/>
-              </a:rPr>
-              <a:t>:</a:t>
-            </a:r>
-            <a:r>
-              <a:rPr lang="en-US" sz="900" dirty="0">
-                <a:solidFill>
-                  <a:srgbClr val="CCCCCC"/>
-                </a:solidFill>
-                <a:latin typeface="Courier New" pitchFamily="34" charset="0"/>
-                <a:ea typeface="Courier New" pitchFamily="34" charset="-122"/>
-                <a:cs typeface="Courier New" pitchFamily="34" charset="-120"/>
-              </a:rPr>
-              <a:t> </a:t>
-            </a:r>
-            <a:r>
-              <a:rPr lang="en-US" sz="900" dirty="0">
-                <a:solidFill>
-                  <a:srgbClr val="CCCCCC"/>
-                </a:solidFill>
-                <a:latin typeface="Courier New" pitchFamily="34" charset="0"/>
-                <a:ea typeface="Courier New" pitchFamily="34" charset="-122"/>
-                <a:cs typeface="Courier New" pitchFamily="34" charset="-120"/>
-              </a:rPr>
-              <a:t>[</a:t>
-            </a:r>
-            <a:r>
-              <a:rPr lang="en-US" sz="900" dirty="0">
-                <a:solidFill>
-                  <a:srgbClr val="CE9178"/>
-                </a:solidFill>
-                <a:latin typeface="Courier New" pitchFamily="34" charset="0"/>
-                <a:ea typeface="Courier New" pitchFamily="34" charset="-122"/>
-                <a:cs typeface="Courier New" pitchFamily="34" charset="-120"/>
-              </a:rPr>
-              <a:t>'TravelStatusText'</a:t>
-            </a:r>
-            <a:r>
-              <a:rPr lang="en-US" sz="900" dirty="0">
-                <a:solidFill>
-                  <a:srgbClr val="CCCCCC"/>
-                </a:solidFill>
-                <a:latin typeface="Courier New" pitchFamily="34" charset="0"/>
-                <a:ea typeface="Courier New" pitchFamily="34" charset="-122"/>
-                <a:cs typeface="Courier New" pitchFamily="34" charset="-120"/>
-              </a:rPr>
-              <a:t>]</a:t>
+              <a:t>StatusPedido</a:t>
+            </a:r>
+            <a:r>
+              <a:rPr lang="en-US" sz="900" dirty="0">
+                <a:solidFill>
+                  <a:srgbClr val="CCCCCC"/>
+                </a:solidFill>
+                <a:latin typeface="Courier New" pitchFamily="34" charset="0"/>
+                <a:ea typeface="Courier New" pitchFamily="34" charset="-122"/>
+                <a:cs typeface="Courier New" pitchFamily="34" charset="-120"/>
+              </a:rPr>
+              <a:t>,</a:t>
             </a:r>
             <a:endParaRPr lang="en-US" sz="900" dirty="0"/>
           </a:p>
@@ -13472,7 +13769,73 @@
                 <a:ea typeface="Courier New" pitchFamily="34" charset="-122"/>
                 <a:cs typeface="Courier New" pitchFamily="34" charset="-120"/>
               </a:rPr>
-              <a:t>OverallStatus</a:t>
+              <a:t>_StatusPedidoTxt</a:t>
+            </a:r>
+            <a:r>
+              <a:rPr lang="en-US" sz="900" dirty="0">
+                <a:solidFill>
+                  <a:srgbClr val="CCCCCC"/>
+                </a:solidFill>
+                <a:latin typeface="Courier New" pitchFamily="34" charset="0"/>
+                <a:ea typeface="Courier New" pitchFamily="34" charset="-122"/>
+                <a:cs typeface="Courier New" pitchFamily="34" charset="-120"/>
+              </a:rPr>
+              <a:t>.</a:t>
+            </a:r>
+            <a:r>
+              <a:rPr lang="en-US" sz="900" dirty="0">
+                <a:solidFill>
+                  <a:srgbClr val="CCCCCC"/>
+                </a:solidFill>
+                <a:latin typeface="Courier New" pitchFamily="34" charset="0"/>
+                <a:ea typeface="Courier New" pitchFamily="34" charset="-122"/>
+                <a:cs typeface="Courier New" pitchFamily="34" charset="-120"/>
+              </a:rPr>
+              <a:t>Descricao</a:t>
+            </a:r>
+            <a:r>
+              <a:rPr lang="en-US" sz="900" dirty="0">
+                <a:solidFill>
+                  <a:srgbClr val="CCCCCC"/>
+                </a:solidFill>
+                <a:latin typeface="Courier New" pitchFamily="34" charset="0"/>
+                <a:ea typeface="Courier New" pitchFamily="34" charset="-122"/>
+                <a:cs typeface="Courier New" pitchFamily="34" charset="-120"/>
+              </a:rPr>
+              <a:t>   </a:t>
+            </a:r>
+            <a:r>
+              <a:rPr lang="en-US" sz="900" dirty="0">
+                <a:solidFill>
+                  <a:srgbClr val="CCCCCC"/>
+                </a:solidFill>
+                <a:latin typeface="Courier New" pitchFamily="34" charset="0"/>
+                <a:ea typeface="Courier New" pitchFamily="34" charset="-122"/>
+                <a:cs typeface="Courier New" pitchFamily="34" charset="-120"/>
+              </a:rPr>
+              <a:t>as</a:t>
+            </a:r>
+            <a:r>
+              <a:rPr lang="en-US" sz="900" dirty="0">
+                <a:solidFill>
+                  <a:srgbClr val="CCCCCC"/>
+                </a:solidFill>
+                <a:latin typeface="Courier New" pitchFamily="34" charset="0"/>
+                <a:ea typeface="Courier New" pitchFamily="34" charset="-122"/>
+                <a:cs typeface="Courier New" pitchFamily="34" charset="-120"/>
+              </a:rPr>
+              <a:t> </a:t>
+            </a:r>
+            <a:r>
+              <a:rPr lang="en-US" sz="900" dirty="0">
+                <a:solidFill>
+                  <a:srgbClr val="CCCCCC"/>
+                </a:solidFill>
+                <a:latin typeface="Courier New" pitchFamily="34" charset="0"/>
+                <a:ea typeface="Courier New" pitchFamily="34" charset="-122"/>
+                <a:cs typeface="Courier New" pitchFamily="34" charset="-120"/>
+              </a:rPr>
+              <a:t>StatusPedidoTexto</a:t>
             </a:r>
             <a:r>
               <a:rPr lang="en-US" sz="900" dirty="0">
@@ -13514,7 +13877,7 @@
                 <a:ea typeface="Courier New" pitchFamily="34" charset="-122"/>
                 <a:cs typeface="Courier New" pitchFamily="34" charset="-120"/>
               </a:rPr>
-              <a:t>_TravelStatus</a:t>
+              <a:t>_StatusPedidoTxt</a:t>
             </a:r>
             <a:r>
               <a:rPr lang="en-US" sz="900" dirty="0">
@@ -13536,7 +13899,7 @@
                 <a:ea typeface="Courier New" pitchFamily="34" charset="-122"/>
                 <a:cs typeface="Courier New" pitchFamily="34" charset="-120"/>
               </a:rPr>
-              <a:t>TravelStatusText</a:t>
+              <a:t>Criticality</a:t>
             </a:r>
             <a:r>
               <a:rPr lang="en-US" sz="900" dirty="0">
@@ -13580,7 +13943,7 @@
                 <a:ea typeface="Courier New" pitchFamily="34" charset="-122"/>
                 <a:cs typeface="Courier New" pitchFamily="34" charset="-120"/>
               </a:rPr>
-              <a:t>TravelStatusText</a:t>
+              <a:t>StatusPedidoCriticality</a:t>
             </a:r>
             <a:r>
               <a:rPr lang="en-US" sz="900" dirty="0">
@@ -13622,7 +13985,7 @@
                 <a:ea typeface="Courier New" pitchFamily="34" charset="-122"/>
                 <a:cs typeface="Courier New" pitchFamily="34" charset="-120"/>
               </a:rPr>
-              <a:t>OverallStatusCriticality</a:t>
+              <a:t>Currency</a:t>
             </a:r>
             <a:r>
               <a:rPr lang="en-US" sz="900" dirty="0">
@@ -13664,7 +14027,7 @@
                 <a:ea typeface="Courier New" pitchFamily="34" charset="-122"/>
                 <a:cs typeface="Courier New" pitchFamily="34" charset="-120"/>
               </a:rPr>
-              <a:t>Description</a:t>
+              <a:t>ValorTotal</a:t>
             </a:r>
             <a:r>
               <a:rPr lang="en-US" sz="900" dirty="0">
@@ -13706,7 +14069,7 @@
                 <a:ea typeface="Courier New" pitchFamily="34" charset="-122"/>
                 <a:cs typeface="Courier New" pitchFamily="34" charset="-120"/>
               </a:rPr>
-              <a:t>LastChangedAt</a:t>
+              <a:t>CreatedAt</a:t>
             </a:r>
             <a:endParaRPr lang="en-US" sz="900" dirty="0"/>
           </a:p>
@@ -14096,7 +14459,7 @@
                 <a:ea typeface="Courier New" pitchFamily="34" charset="-122"/>
                 <a:cs typeface="Courier New" pitchFamily="34" charset="-120"/>
               </a:rPr>
-              <a:t>_TravelStatus.TravelStatusText</a:t>
+              <a:t>_StatusPedidoTxt.Descricao</a:t>
             </a:r>
             <a:r>
               <a:rPr lang="en-US" sz="1050" dirty="0">
@@ -14104,7 +14467,7 @@
                   <a:srgbClr val="556B82"/>
                 </a:solidFill>
               </a:rPr>
-              <a:t> traz a descrição do status.</a:t>
+              <a:t> traz a descrição do status da lista de códigos.</a:t>
             </a:r>
             <a:endParaRPr lang="en-US" sz="1400" dirty="0"/>
           </a:p>
@@ -14213,7 +14576,26 @@
                   <a:srgbClr val="556B82"/>
                 </a:solidFill>
               </a:rPr>
-              <a:t>Campo numérico (0 a 3) calculado no BO; a UI usa para cores e ícones.</a:t>
+              <a:t>Valor de 0 a 3 guardado em </a:t>
+            </a:r>
+            <a:r>
+              <a:rPr lang="en-US" sz="1050" dirty="0">
+                <a:solidFill>
+                  <a:srgbClr val="0064D9"/>
+                </a:solidFill>
+                <a:latin typeface="Courier New" pitchFamily="34" charset="0"/>
+                <a:ea typeface="Courier New" pitchFamily="34" charset="-122"/>
+                <a:cs typeface="Courier New" pitchFamily="34" charset="-120"/>
+              </a:rPr>
+              <a:t>ZTA_PC_CODELIST</a:t>
+            </a:r>
+            <a:r>
+              <a:rPr lang="en-US" sz="1050" dirty="0">
+                <a:solidFill>
+                  <a:srgbClr val="556B82"/>
+                </a:solidFill>
+              </a:rPr>
+              <a:t> para cada status; a UI usa para cores e ícones.</a:t>
             </a:r>
             <a:endParaRPr lang="en-US" sz="1400" dirty="0"/>
           </a:p>
@@ -14695,7 +15077,7 @@
                   <a:srgbClr val="556B82"/>
                 </a:solidFill>
               </a:rPr>
-              <a:t> (no curso) com </a:t>
+              <a:t> (como no projeto) com </a:t>
             </a:r>
             <a:r>
               <a:rPr lang="en-US" sz="1150" dirty="0">
@@ -15256,7 +15638,7 @@
                   <a:srgbClr val="89D1FF"/>
                 </a:solidFill>
               </a:rPr>
-              <a:t>AULA 03.03 · SEÇÃO 2</a:t>
+              <a:t>AULA 05.03 · SEÇÃO 2</a:t>
             </a:r>
             <a:endParaRPr lang="en-US" sz="1300" dirty="0"/>
           </a:p>
@@ -15822,7 +16204,7 @@
         <p:spPr>
           <a:xfrm>
             <a:off x="640080" y="1700784"/>
-            <a:ext cx="2852928" cy="292608"/>
+            <a:ext cx="2619756" cy="292608"/>
           </a:xfrm>
           <a:prstGeom prst="rect">
             <a:avLst/>
@@ -15842,7 +16224,7 @@
         <p:spPr>
           <a:xfrm>
             <a:off x="640080" y="1700784"/>
-            <a:ext cx="2852928" cy="27432"/>
+            <a:ext cx="2619756" cy="27432"/>
           </a:xfrm>
           <a:prstGeom prst="rect">
             <a:avLst/>
@@ -15862,7 +16244,7 @@
         <p:spPr>
           <a:xfrm>
             <a:off x="731520" y="1719072"/>
-            <a:ext cx="2670048" cy="274320"/>
+            <a:ext cx="2436876" cy="274320"/>
           </a:xfrm>
           <a:prstGeom prst="rect">
             <a:avLst/>
@@ -15883,7 +16265,7 @@
                   <a:srgbClr val="FFFFFF"/>
                 </a:solidFill>
               </a:rPr>
-              <a:t>zc_fe_travel_######.ddlx.asddlxs</a:t>
+              <a:t>zc_pc_pedido_app.ddlx.asddlxs</a:t>
             </a:r>
             <a:endParaRPr lang="en-US" sz="950" dirty="0"/>
           </a:p>
@@ -15919,7 +16301,7 @@
                   <a:srgbClr val="9DA5B4"/>
                 </a:solidFill>
               </a:rPr>
-              <a:t>ZFE_TRAVEL_###### › Metadata Extensions</a:t>
+              <a:t>ZAVBS_PC_PEDIDOS › ZC_PC_PEDIDO_APP (simplificada)</a:t>
             </a:r>
             <a:endParaRPr lang="en-US" sz="850" dirty="0"/>
           </a:p>
@@ -16305,6 +16687,26 @@
             </a:r>
             <a:endParaRPr lang="en-US" sz="900" dirty="0"/>
           </a:p>
+          <a:p>
+            <a:pPr algn="r" indent="0" marL="0">
+              <a:lnSpc>
+                <a:spcPct val="105000"/>
+              </a:lnSpc>
+              <a:buNone/>
+            </a:pPr>
+            <a:r>
+              <a:rPr lang="en-US" sz="900" dirty="0">
+                <a:solidFill>
+                  <a:srgbClr val="6E7681"/>
+                </a:solidFill>
+                <a:latin typeface="Courier New" pitchFamily="34" charset="0"/>
+                <a:ea typeface="Courier New" pitchFamily="34" charset="-122"/>
+                <a:cs typeface="Courier New" pitchFamily="34" charset="-120"/>
+              </a:rPr>
+              <a:t>19</a:t>
+            </a:r>
+            <a:endParaRPr lang="en-US" sz="900" dirty="0"/>
+          </a:p>
         </p:txBody>
       </p:sp>
       <p:sp>
@@ -16561,73 +16963,7 @@
                 <a:ea typeface="Courier New" pitchFamily="34" charset="-122"/>
                 <a:cs typeface="Courier New" pitchFamily="34" charset="-120"/>
               </a:rPr>
-              <a:t>'Travel'</a:t>
-            </a:r>
-            <a:r>
-              <a:rPr lang="en-US" sz="900" dirty="0">
-                <a:solidFill>
-                  <a:srgbClr val="CCCCCC"/>
-                </a:solidFill>
-                <a:latin typeface="Courier New" pitchFamily="34" charset="0"/>
-                <a:ea typeface="Courier New" pitchFamily="34" charset="-122"/>
-                <a:cs typeface="Courier New" pitchFamily="34" charset="-120"/>
-              </a:rPr>
-              <a:t>,</a:t>
-            </a:r>
-            <a:r>
-              <a:rPr lang="en-US" sz="900" dirty="0">
-                <a:solidFill>
-                  <a:srgbClr val="CCCCCC"/>
-                </a:solidFill>
-                <a:latin typeface="Courier New" pitchFamily="34" charset="0"/>
-                <a:ea typeface="Courier New" pitchFamily="34" charset="-122"/>
-                <a:cs typeface="Courier New" pitchFamily="34" charset="-120"/>
-              </a:rPr>
-              <a:t> </a:t>
-            </a:r>
-            <a:r>
-              <a:rPr lang="en-US" sz="900" dirty="0">
-                <a:solidFill>
-                  <a:srgbClr val="CCCCCC"/>
-                </a:solidFill>
-                <a:latin typeface="Courier New" pitchFamily="34" charset="0"/>
-                <a:ea typeface="Courier New" pitchFamily="34" charset="-122"/>
-                <a:cs typeface="Courier New" pitchFamily="34" charset="-120"/>
-              </a:rPr>
-              <a:t>typeNamePlural</a:t>
-            </a:r>
-            <a:r>
-              <a:rPr lang="en-US" sz="900" dirty="0">
-                <a:solidFill>
-                  <a:srgbClr val="CCCCCC"/>
-                </a:solidFill>
-                <a:latin typeface="Courier New" pitchFamily="34" charset="0"/>
-                <a:ea typeface="Courier New" pitchFamily="34" charset="-122"/>
-                <a:cs typeface="Courier New" pitchFamily="34" charset="-120"/>
-              </a:rPr>
-              <a:t>:</a:t>
-            </a:r>
-            <a:r>
-              <a:rPr lang="en-US" sz="900" dirty="0">
-                <a:solidFill>
-                  <a:srgbClr val="CCCCCC"/>
-                </a:solidFill>
-                <a:latin typeface="Courier New" pitchFamily="34" charset="0"/>
-                <a:ea typeface="Courier New" pitchFamily="34" charset="-122"/>
-                <a:cs typeface="Courier New" pitchFamily="34" charset="-120"/>
-              </a:rPr>
-              <a:t> </a:t>
-            </a:r>
-            <a:r>
-              <a:rPr lang="en-US" sz="900" dirty="0">
-                <a:solidFill>
-                  <a:srgbClr val="CE9178"/>
-                </a:solidFill>
-                <a:latin typeface="Courier New" pitchFamily="34" charset="0"/>
-                <a:ea typeface="Courier New" pitchFamily="34" charset="-122"/>
-                <a:cs typeface="Courier New" pitchFamily="34" charset="-120"/>
-              </a:rPr>
-              <a:t>'Travels'</a:t>
+              <a:t>'Pedido de compra'</a:t>
             </a:r>
             <a:r>
               <a:rPr lang="en-US" sz="900" dirty="0">
@@ -16669,7 +17005,7 @@
                 <a:ea typeface="Courier New" pitchFamily="34" charset="-122"/>
                 <a:cs typeface="Courier New" pitchFamily="34" charset="-120"/>
               </a:rPr>
-              <a:t>title</a:t>
+              <a:t>typeNamePlural</a:t>
             </a:r>
             <a:r>
               <a:rPr lang="en-US" sz="900" dirty="0">
@@ -16691,172 +17027,18 @@
                 <a:ea typeface="Courier New" pitchFamily="34" charset="-122"/>
                 <a:cs typeface="Courier New" pitchFamily="34" charset="-120"/>
               </a:rPr>
-              <a:t>       </a:t>
-            </a:r>
-            <a:r>
-              <a:rPr lang="en-US" sz="900" dirty="0">
-                <a:solidFill>
-                  <a:srgbClr val="CCCCCC"/>
-                </a:solidFill>
-                <a:latin typeface="Courier New" pitchFamily="34" charset="0"/>
-                <a:ea typeface="Courier New" pitchFamily="34" charset="-122"/>
-                <a:cs typeface="Courier New" pitchFamily="34" charset="-120"/>
-              </a:rPr>
-              <a:t>{</a:t>
-            </a:r>
-            <a:r>
-              <a:rPr lang="en-US" sz="900" dirty="0">
-                <a:solidFill>
-                  <a:srgbClr val="CCCCCC"/>
-                </a:solidFill>
-                <a:latin typeface="Courier New" pitchFamily="34" charset="0"/>
-                <a:ea typeface="Courier New" pitchFamily="34" charset="-122"/>
-                <a:cs typeface="Courier New" pitchFamily="34" charset="-120"/>
-              </a:rPr>
               <a:t> </a:t>
             </a:r>
             <a:r>
               <a:rPr lang="en-US" sz="900" dirty="0">
                 <a:solidFill>
-                  <a:srgbClr val="CCCCCC"/>
-                </a:solidFill>
-                <a:latin typeface="Courier New" pitchFamily="34" charset="0"/>
-                <a:ea typeface="Courier New" pitchFamily="34" charset="-122"/>
-                <a:cs typeface="Courier New" pitchFamily="34" charset="-120"/>
-              </a:rPr>
-              <a:t>type</a:t>
-            </a:r>
-            <a:r>
-              <a:rPr lang="en-US" sz="900" dirty="0">
-                <a:solidFill>
-                  <a:srgbClr val="CCCCCC"/>
-                </a:solidFill>
-                <a:latin typeface="Courier New" pitchFamily="34" charset="0"/>
-                <a:ea typeface="Courier New" pitchFamily="34" charset="-122"/>
-                <a:cs typeface="Courier New" pitchFamily="34" charset="-120"/>
-              </a:rPr>
-              <a:t>:</a:t>
-            </a:r>
-            <a:r>
-              <a:rPr lang="en-US" sz="900" dirty="0">
-                <a:solidFill>
-                  <a:srgbClr val="CCCCCC"/>
-                </a:solidFill>
-                <a:latin typeface="Courier New" pitchFamily="34" charset="0"/>
-                <a:ea typeface="Courier New" pitchFamily="34" charset="-122"/>
-                <a:cs typeface="Courier New" pitchFamily="34" charset="-120"/>
-              </a:rPr>
-              <a:t> </a:t>
-            </a:r>
-            <a:r>
-              <a:rPr lang="en-US" sz="900" dirty="0">
-                <a:solidFill>
-                  <a:srgbClr val="CCCCCC"/>
-                </a:solidFill>
-                <a:latin typeface="Courier New" pitchFamily="34" charset="0"/>
-                <a:ea typeface="Courier New" pitchFamily="34" charset="-122"/>
-                <a:cs typeface="Courier New" pitchFamily="34" charset="-120"/>
-              </a:rPr>
-              <a:t>#</a:t>
-            </a:r>
-            <a:r>
-              <a:rPr lang="en-US" sz="900" dirty="0">
-                <a:solidFill>
-                  <a:srgbClr val="569CD6"/>
-                </a:solidFill>
-                <a:latin typeface="Courier New" pitchFamily="34" charset="0"/>
-                <a:ea typeface="Courier New" pitchFamily="34" charset="-122"/>
-                <a:cs typeface="Courier New" pitchFamily="34" charset="-120"/>
-              </a:rPr>
-              <a:t>STANDARD</a:t>
-            </a:r>
-            <a:r>
-              <a:rPr lang="en-US" sz="900" dirty="0">
-                <a:solidFill>
-                  <a:srgbClr val="CCCCCC"/>
-                </a:solidFill>
-                <a:latin typeface="Courier New" pitchFamily="34" charset="0"/>
-                <a:ea typeface="Courier New" pitchFamily="34" charset="-122"/>
-                <a:cs typeface="Courier New" pitchFamily="34" charset="-120"/>
-              </a:rPr>
-              <a:t>,</a:t>
-            </a:r>
-            <a:r>
-              <a:rPr lang="en-US" sz="900" dirty="0">
-                <a:solidFill>
-                  <a:srgbClr val="CCCCCC"/>
-                </a:solidFill>
-                <a:latin typeface="Courier New" pitchFamily="34" charset="0"/>
-                <a:ea typeface="Courier New" pitchFamily="34" charset="-122"/>
-                <a:cs typeface="Courier New" pitchFamily="34" charset="-120"/>
-              </a:rPr>
-              <a:t> </a:t>
-            </a:r>
-            <a:r>
-              <a:rPr lang="en-US" sz="900" dirty="0">
-                <a:solidFill>
-                  <a:srgbClr val="CCCCCC"/>
-                </a:solidFill>
-                <a:latin typeface="Courier New" pitchFamily="34" charset="0"/>
-                <a:ea typeface="Courier New" pitchFamily="34" charset="-122"/>
-                <a:cs typeface="Courier New" pitchFamily="34" charset="-120"/>
-              </a:rPr>
-              <a:t>value</a:t>
-            </a:r>
-            <a:r>
-              <a:rPr lang="en-US" sz="900" dirty="0">
-                <a:solidFill>
-                  <a:srgbClr val="CCCCCC"/>
-                </a:solidFill>
-                <a:latin typeface="Courier New" pitchFamily="34" charset="0"/>
-                <a:ea typeface="Courier New" pitchFamily="34" charset="-122"/>
-                <a:cs typeface="Courier New" pitchFamily="34" charset="-120"/>
-              </a:rPr>
-              <a:t>:</a:t>
-            </a:r>
-            <a:r>
-              <a:rPr lang="en-US" sz="900" dirty="0">
-                <a:solidFill>
-                  <a:srgbClr val="CCCCCC"/>
-                </a:solidFill>
-                <a:latin typeface="Courier New" pitchFamily="34" charset="0"/>
-                <a:ea typeface="Courier New" pitchFamily="34" charset="-122"/>
-                <a:cs typeface="Courier New" pitchFamily="34" charset="-120"/>
-              </a:rPr>
-              <a:t> </a:t>
-            </a:r>
-            <a:r>
-              <a:rPr lang="en-US" sz="900" dirty="0">
-                <a:solidFill>
                   <a:srgbClr val="CE9178"/>
                 </a:solidFill>
                 <a:latin typeface="Courier New" pitchFamily="34" charset="0"/>
                 <a:ea typeface="Courier New" pitchFamily="34" charset="-122"/>
                 <a:cs typeface="Courier New" pitchFamily="34" charset="-120"/>
               </a:rPr>
-              <a:t>'Description'</a:t>
-            </a:r>
-            <a:r>
-              <a:rPr lang="en-US" sz="900" dirty="0">
-                <a:solidFill>
-                  <a:srgbClr val="CCCCCC"/>
-                </a:solidFill>
-                <a:latin typeface="Courier New" pitchFamily="34" charset="0"/>
-                <a:ea typeface="Courier New" pitchFamily="34" charset="-122"/>
-                <a:cs typeface="Courier New" pitchFamily="34" charset="-120"/>
-              </a:rPr>
-              <a:t> </a:t>
-            </a:r>
-            <a:r>
-              <a:rPr lang="en-US" sz="900" dirty="0">
-                <a:solidFill>
-                  <a:srgbClr val="CCCCCC"/>
-                </a:solidFill>
-                <a:latin typeface="Courier New" pitchFamily="34" charset="0"/>
-                <a:ea typeface="Courier New" pitchFamily="34" charset="-122"/>
-                <a:cs typeface="Courier New" pitchFamily="34" charset="-120"/>
-              </a:rPr>
-              <a:t>}</a:t>
+              <a:t>'Pedidos de compras'</a:t>
             </a:r>
             <a:r>
               <a:rPr lang="en-US" sz="900" dirty="0">
@@ -16898,7 +17080,7 @@
                 <a:ea typeface="Courier New" pitchFamily="34" charset="-122"/>
                 <a:cs typeface="Courier New" pitchFamily="34" charset="-120"/>
               </a:rPr>
-              <a:t>description</a:t>
+              <a:t>title</a:t>
             </a:r>
             <a:r>
               <a:rPr lang="en-US" sz="900" dirty="0">
@@ -16920,6 +17102,28 @@
                 <a:ea typeface="Courier New" pitchFamily="34" charset="-122"/>
                 <a:cs typeface="Courier New" pitchFamily="34" charset="-120"/>
               </a:rPr>
+              <a:t>       </a:t>
+            </a:r>
+            <a:r>
+              <a:rPr lang="en-US" sz="900" dirty="0">
+                <a:solidFill>
+                  <a:srgbClr val="CCCCCC"/>
+                </a:solidFill>
+                <a:latin typeface="Courier New" pitchFamily="34" charset="0"/>
+                <a:ea typeface="Courier New" pitchFamily="34" charset="-122"/>
+                <a:cs typeface="Courier New" pitchFamily="34" charset="-120"/>
+              </a:rPr>
+              <a:t>{</a:t>
+            </a:r>
+            <a:r>
+              <a:rPr lang="en-US" sz="900" dirty="0">
+                <a:solidFill>
+                  <a:srgbClr val="CCCCCC"/>
+                </a:solidFill>
+                <a:latin typeface="Courier New" pitchFamily="34" charset="0"/>
+                <a:ea typeface="Courier New" pitchFamily="34" charset="-122"/>
+                <a:cs typeface="Courier New" pitchFamily="34" charset="-120"/>
+              </a:rPr>
               <a:t> </a:t>
             </a:r>
             <a:r>
@@ -16931,7 +17135,18 @@
                 <a:ea typeface="Courier New" pitchFamily="34" charset="-122"/>
                 <a:cs typeface="Courier New" pitchFamily="34" charset="-120"/>
               </a:rPr>
-              <a:t>{</a:t>
+              <a:t>type</a:t>
+            </a:r>
+            <a:r>
+              <a:rPr lang="en-US" sz="900" dirty="0">
+                <a:solidFill>
+                  <a:srgbClr val="CCCCCC"/>
+                </a:solidFill>
+                <a:latin typeface="Courier New" pitchFamily="34" charset="0"/>
+                <a:ea typeface="Courier New" pitchFamily="34" charset="-122"/>
+                <a:cs typeface="Courier New" pitchFamily="34" charset="-120"/>
+              </a:rPr>
+              <a:t>:</a:t>
             </a:r>
             <a:r>
               <a:rPr lang="en-US" sz="900" dirty="0">
@@ -16953,7 +17168,51 @@
                 <a:ea typeface="Courier New" pitchFamily="34" charset="-122"/>
                 <a:cs typeface="Courier New" pitchFamily="34" charset="-120"/>
               </a:rPr>
-              <a:t>type</a:t>
+              <a:t>#</a:t>
+            </a:r>
+            <a:r>
+              <a:rPr lang="en-US" sz="900" dirty="0">
+                <a:solidFill>
+                  <a:srgbClr val="569CD6"/>
+                </a:solidFill>
+                <a:latin typeface="Courier New" pitchFamily="34" charset="0"/>
+                <a:ea typeface="Courier New" pitchFamily="34" charset="-122"/>
+                <a:cs typeface="Courier New" pitchFamily="34" charset="-120"/>
+              </a:rPr>
+              <a:t>STANDARD</a:t>
+            </a:r>
+            <a:r>
+              <a:rPr lang="en-US" sz="900" dirty="0">
+                <a:solidFill>
+                  <a:srgbClr val="CCCCCC"/>
+                </a:solidFill>
+                <a:latin typeface="Courier New" pitchFamily="34" charset="0"/>
+                <a:ea typeface="Courier New" pitchFamily="34" charset="-122"/>
+                <a:cs typeface="Courier New" pitchFamily="34" charset="-120"/>
+              </a:rPr>
+              <a:t>,</a:t>
+            </a:r>
+            <a:r>
+              <a:rPr lang="en-US" sz="900" dirty="0">
+                <a:solidFill>
+                  <a:srgbClr val="CCCCCC"/>
+                </a:solidFill>
+                <a:latin typeface="Courier New" pitchFamily="34" charset="0"/>
+                <a:ea typeface="Courier New" pitchFamily="34" charset="-122"/>
+                <a:cs typeface="Courier New" pitchFamily="34" charset="-120"/>
+              </a:rPr>
+              <a:t> </a:t>
+            </a:r>
+            <a:r>
+              <a:rPr lang="en-US" sz="900" dirty="0">
+                <a:solidFill>
+                  <a:srgbClr val="CCCCCC"/>
+                </a:solidFill>
+                <a:latin typeface="Courier New" pitchFamily="34" charset="0"/>
+                <a:ea typeface="Courier New" pitchFamily="34" charset="-122"/>
+                <a:cs typeface="Courier New" pitchFamily="34" charset="-120"/>
+              </a:rPr>
+              <a:t>value</a:t>
             </a:r>
             <a:r>
               <a:rPr lang="en-US" sz="900" dirty="0">
@@ -16980,24 +17239,35 @@
             <a:r>
               <a:rPr lang="en-US" sz="900" dirty="0">
                 <a:solidFill>
-                  <a:srgbClr val="CCCCCC"/>
-                </a:solidFill>
-                <a:latin typeface="Courier New" pitchFamily="34" charset="0"/>
-                <a:ea typeface="Courier New" pitchFamily="34" charset="-122"/>
-                <a:cs typeface="Courier New" pitchFamily="34" charset="-120"/>
-              </a:rPr>
-              <a:t>#</a:t>
-            </a:r>
-            <a:r>
-              <a:rPr lang="en-US" sz="900" dirty="0">
-                <a:solidFill>
-                  <a:srgbClr val="569CD6"/>
-                </a:solidFill>
-                <a:latin typeface="Courier New" pitchFamily="34" charset="0"/>
-                <a:ea typeface="Courier New" pitchFamily="34" charset="-122"/>
-                <a:cs typeface="Courier New" pitchFamily="34" charset="-120"/>
-              </a:rPr>
-              <a:t>STANDARD</a:t>
+                  <a:srgbClr val="CE9178"/>
+                </a:solidFill>
+                <a:latin typeface="Courier New" pitchFamily="34" charset="0"/>
+                <a:ea typeface="Courier New" pitchFamily="34" charset="-122"/>
+                <a:cs typeface="Courier New" pitchFamily="34" charset="-120"/>
+              </a:rPr>
+              <a:t>'NumeroPedido'</a:t>
+            </a:r>
+            <a:r>
+              <a:rPr lang="en-US" sz="900" dirty="0">
+                <a:solidFill>
+                  <a:srgbClr val="CCCCCC"/>
+                </a:solidFill>
+                <a:latin typeface="Courier New" pitchFamily="34" charset="0"/>
+                <a:ea typeface="Courier New" pitchFamily="34" charset="-122"/>
+                <a:cs typeface="Courier New" pitchFamily="34" charset="-120"/>
+              </a:rPr>
+              <a:t> </a:t>
+            </a:r>
+            <a:r>
+              <a:rPr lang="en-US" sz="900" dirty="0">
+                <a:solidFill>
+                  <a:srgbClr val="CCCCCC"/>
+                </a:solidFill>
+                <a:latin typeface="Courier New" pitchFamily="34" charset="0"/>
+                <a:ea typeface="Courier New" pitchFamily="34" charset="-122"/>
+                <a:cs typeface="Courier New" pitchFamily="34" charset="-120"/>
+              </a:rPr>
+              <a:t>}</a:t>
             </a:r>
             <a:r>
               <a:rPr lang="en-US" sz="900" dirty="0">
@@ -17009,105 +17279,6 @@
                 <a:cs typeface="Courier New" pitchFamily="34" charset="-120"/>
               </a:rPr>
               <a:t>,</a:t>
-            </a:r>
-            <a:r>
-              <a:rPr lang="en-US" sz="900" dirty="0">
-                <a:solidFill>
-                  <a:srgbClr val="CCCCCC"/>
-                </a:solidFill>
-                <a:latin typeface="Courier New" pitchFamily="34" charset="0"/>
-                <a:ea typeface="Courier New" pitchFamily="34" charset="-122"/>
-                <a:cs typeface="Courier New" pitchFamily="34" charset="-120"/>
-              </a:rPr>
-              <a:t> </a:t>
-            </a:r>
-            <a:r>
-              <a:rPr lang="en-US" sz="900" dirty="0">
-                <a:solidFill>
-                  <a:srgbClr val="CCCCCC"/>
-                </a:solidFill>
-                <a:latin typeface="Courier New" pitchFamily="34" charset="0"/>
-                <a:ea typeface="Courier New" pitchFamily="34" charset="-122"/>
-                <a:cs typeface="Courier New" pitchFamily="34" charset="-120"/>
-              </a:rPr>
-              <a:t>value</a:t>
-            </a:r>
-            <a:r>
-              <a:rPr lang="en-US" sz="900" dirty="0">
-                <a:solidFill>
-                  <a:srgbClr val="CCCCCC"/>
-                </a:solidFill>
-                <a:latin typeface="Courier New" pitchFamily="34" charset="0"/>
-                <a:ea typeface="Courier New" pitchFamily="34" charset="-122"/>
-                <a:cs typeface="Courier New" pitchFamily="34" charset="-120"/>
-              </a:rPr>
-              <a:t>:</a:t>
-            </a:r>
-            <a:r>
-              <a:rPr lang="en-US" sz="900" dirty="0">
-                <a:solidFill>
-                  <a:srgbClr val="CCCCCC"/>
-                </a:solidFill>
-                <a:latin typeface="Courier New" pitchFamily="34" charset="0"/>
-                <a:ea typeface="Courier New" pitchFamily="34" charset="-122"/>
-                <a:cs typeface="Courier New" pitchFamily="34" charset="-120"/>
-              </a:rPr>
-              <a:t> </a:t>
-            </a:r>
-            <a:r>
-              <a:rPr lang="en-US" sz="900" dirty="0">
-                <a:solidFill>
-                  <a:srgbClr val="CE9178"/>
-                </a:solidFill>
-                <a:latin typeface="Courier New" pitchFamily="34" charset="0"/>
-                <a:ea typeface="Courier New" pitchFamily="34" charset="-122"/>
-                <a:cs typeface="Courier New" pitchFamily="34" charset="-120"/>
-              </a:rPr>
-              <a:t>'TravelID'</a:t>
-            </a:r>
-            <a:r>
-              <a:rPr lang="en-US" sz="900" dirty="0">
-                <a:solidFill>
-                  <a:srgbClr val="CCCCCC"/>
-                </a:solidFill>
-                <a:latin typeface="Courier New" pitchFamily="34" charset="0"/>
-                <a:ea typeface="Courier New" pitchFamily="34" charset="-122"/>
-                <a:cs typeface="Courier New" pitchFamily="34" charset="-120"/>
-              </a:rPr>
-              <a:t> </a:t>
-            </a:r>
-            <a:r>
-              <a:rPr lang="en-US" sz="900" dirty="0">
-                <a:solidFill>
-                  <a:srgbClr val="CCCCCC"/>
-                </a:solidFill>
-                <a:latin typeface="Courier New" pitchFamily="34" charset="0"/>
-                <a:ea typeface="Courier New" pitchFamily="34" charset="-122"/>
-                <a:cs typeface="Courier New" pitchFamily="34" charset="-120"/>
-              </a:rPr>
-              <a:t>}</a:t>
-            </a:r>
-            <a:r>
-              <a:rPr lang="en-US" sz="900" dirty="0">
-                <a:solidFill>
-                  <a:srgbClr val="CCCCCC"/>
-                </a:solidFill>
-                <a:latin typeface="Courier New" pitchFamily="34" charset="0"/>
-                <a:ea typeface="Courier New" pitchFamily="34" charset="-122"/>
-                <a:cs typeface="Courier New" pitchFamily="34" charset="-120"/>
-              </a:rPr>
-              <a:t> </a:t>
-            </a:r>
-            <a:r>
-              <a:rPr lang="en-US" sz="900" dirty="0">
-                <a:solidFill>
-                  <a:srgbClr val="CCCCCC"/>
-                </a:solidFill>
-                <a:latin typeface="Courier New" pitchFamily="34" charset="0"/>
-                <a:ea typeface="Courier New" pitchFamily="34" charset="-122"/>
-                <a:cs typeface="Courier New" pitchFamily="34" charset="-120"/>
-              </a:rPr>
-              <a:t>}</a:t>
             </a:r>
             <a:endParaRPr lang="en-US" sz="900" dirty="0"/>
           </a:p>
@@ -17127,7 +17298,29 @@
                 <a:ea typeface="Courier New" pitchFamily="34" charset="-122"/>
                 <a:cs typeface="Courier New" pitchFamily="34" charset="-120"/>
               </a:rPr>
-              <a:t>annotate</a:t>
+              <a:t>                  </a:t>
+            </a:r>
+            <a:r>
+              <a:rPr lang="en-US" sz="900" dirty="0">
+                <a:solidFill>
+                  <a:srgbClr val="CCCCCC"/>
+                </a:solidFill>
+                <a:latin typeface="Courier New" pitchFamily="34" charset="0"/>
+                <a:ea typeface="Courier New" pitchFamily="34" charset="-122"/>
+                <a:cs typeface="Courier New" pitchFamily="34" charset="-120"/>
+              </a:rPr>
+              <a:t>description</a:t>
+            </a:r>
+            <a:r>
+              <a:rPr lang="en-US" sz="900" dirty="0">
+                <a:solidFill>
+                  <a:srgbClr val="CCCCCC"/>
+                </a:solidFill>
+                <a:latin typeface="Courier New" pitchFamily="34" charset="0"/>
+                <a:ea typeface="Courier New" pitchFamily="34" charset="-122"/>
+                <a:cs typeface="Courier New" pitchFamily="34" charset="-120"/>
+              </a:rPr>
+              <a:t>:</a:t>
             </a:r>
             <a:r>
               <a:rPr lang="en-US" sz="900" dirty="0">
@@ -17149,7 +17342,7 @@
                 <a:ea typeface="Courier New" pitchFamily="34" charset="-122"/>
                 <a:cs typeface="Courier New" pitchFamily="34" charset="-120"/>
               </a:rPr>
-              <a:t>entity</a:t>
+              <a:t>{</a:t>
             </a:r>
             <a:r>
               <a:rPr lang="en-US" sz="900" dirty="0">
@@ -17171,7 +17364,29 @@
                 <a:ea typeface="Courier New" pitchFamily="34" charset="-122"/>
                 <a:cs typeface="Courier New" pitchFamily="34" charset="-120"/>
               </a:rPr>
-              <a:t>ZC_FE_TRAVEL_</a:t>
+              <a:t>type</a:t>
+            </a:r>
+            <a:r>
+              <a:rPr lang="en-US" sz="900" dirty="0">
+                <a:solidFill>
+                  <a:srgbClr val="CCCCCC"/>
+                </a:solidFill>
+                <a:latin typeface="Courier New" pitchFamily="34" charset="0"/>
+                <a:ea typeface="Courier New" pitchFamily="34" charset="-122"/>
+                <a:cs typeface="Courier New" pitchFamily="34" charset="-120"/>
+              </a:rPr>
+              <a:t>:</a:t>
+            </a:r>
+            <a:r>
+              <a:rPr lang="en-US" sz="900" dirty="0">
+                <a:solidFill>
+                  <a:srgbClr val="CCCCCC"/>
+                </a:solidFill>
+                <a:latin typeface="Courier New" pitchFamily="34" charset="0"/>
+                <a:ea typeface="Courier New" pitchFamily="34" charset="-122"/>
+                <a:cs typeface="Courier New" pitchFamily="34" charset="-120"/>
+              </a:rPr>
+              <a:t> </a:t>
             </a:r>
             <a:r>
               <a:rPr lang="en-US" sz="900" dirty="0">
@@ -17187,57 +17402,24 @@
             <a:r>
               <a:rPr lang="en-US" sz="900" dirty="0">
                 <a:solidFill>
-                  <a:srgbClr val="CCCCCC"/>
-                </a:solidFill>
-                <a:latin typeface="Courier New" pitchFamily="34" charset="0"/>
-                <a:ea typeface="Courier New" pitchFamily="34" charset="-122"/>
-                <a:cs typeface="Courier New" pitchFamily="34" charset="-120"/>
-              </a:rPr>
-              <a:t>#</a:t>
-            </a:r>
-            <a:r>
-              <a:rPr lang="en-US" sz="900" dirty="0">
-                <a:solidFill>
-                  <a:srgbClr val="CCCCCC"/>
-                </a:solidFill>
-                <a:latin typeface="Courier New" pitchFamily="34" charset="0"/>
-                <a:ea typeface="Courier New" pitchFamily="34" charset="-122"/>
-                <a:cs typeface="Courier New" pitchFamily="34" charset="-120"/>
-              </a:rPr>
-              <a:t>#</a:t>
-            </a:r>
-            <a:r>
-              <a:rPr lang="en-US" sz="900" dirty="0">
-                <a:solidFill>
-                  <a:srgbClr val="CCCCCC"/>
-                </a:solidFill>
-                <a:latin typeface="Courier New" pitchFamily="34" charset="0"/>
-                <a:ea typeface="Courier New" pitchFamily="34" charset="-122"/>
-                <a:cs typeface="Courier New" pitchFamily="34" charset="-120"/>
-              </a:rPr>
-              <a:t>#</a:t>
-            </a:r>
-            <a:r>
-              <a:rPr lang="en-US" sz="900" dirty="0">
-                <a:solidFill>
-                  <a:srgbClr val="CCCCCC"/>
-                </a:solidFill>
-                <a:latin typeface="Courier New" pitchFamily="34" charset="0"/>
-                <a:ea typeface="Courier New" pitchFamily="34" charset="-122"/>
-                <a:cs typeface="Courier New" pitchFamily="34" charset="-120"/>
-              </a:rPr>
-              <a:t>#</a:t>
-            </a:r>
-            <a:r>
-              <a:rPr lang="en-US" sz="900" dirty="0">
-                <a:solidFill>
-                  <a:srgbClr val="CCCCCC"/>
-                </a:solidFill>
-                <a:latin typeface="Courier New" pitchFamily="34" charset="0"/>
-                <a:ea typeface="Courier New" pitchFamily="34" charset="-122"/>
-                <a:cs typeface="Courier New" pitchFamily="34" charset="-120"/>
-              </a:rPr>
-              <a:t>#</a:t>
+                  <a:srgbClr val="569CD6"/>
+                </a:solidFill>
+                <a:latin typeface="Courier New" pitchFamily="34" charset="0"/>
+                <a:ea typeface="Courier New" pitchFamily="34" charset="-122"/>
+                <a:cs typeface="Courier New" pitchFamily="34" charset="-120"/>
+              </a:rPr>
+              <a:t>STANDARD</a:t>
+            </a:r>
+            <a:r>
+              <a:rPr lang="en-US" sz="900" dirty="0">
+                <a:solidFill>
+                  <a:srgbClr val="CCCCCC"/>
+                </a:solidFill>
+                <a:latin typeface="Courier New" pitchFamily="34" charset="0"/>
+                <a:ea typeface="Courier New" pitchFamily="34" charset="-122"/>
+                <a:cs typeface="Courier New" pitchFamily="34" charset="-120"/>
+              </a:rPr>
+              <a:t>,</a:t>
             </a:r>
             <a:r>
               <a:rPr lang="en-US" sz="900" dirty="0">
@@ -17259,7 +17441,84 @@
                 <a:ea typeface="Courier New" pitchFamily="34" charset="-122"/>
                 <a:cs typeface="Courier New" pitchFamily="34" charset="-120"/>
               </a:rPr>
-              <a:t>with</a:t>
+              <a:t>value</a:t>
+            </a:r>
+            <a:r>
+              <a:rPr lang="en-US" sz="900" dirty="0">
+                <a:solidFill>
+                  <a:srgbClr val="CCCCCC"/>
+                </a:solidFill>
+                <a:latin typeface="Courier New" pitchFamily="34" charset="0"/>
+                <a:ea typeface="Courier New" pitchFamily="34" charset="-122"/>
+                <a:cs typeface="Courier New" pitchFamily="34" charset="-120"/>
+              </a:rPr>
+              <a:t>:</a:t>
+            </a:r>
+            <a:r>
+              <a:rPr lang="en-US" sz="900" dirty="0">
+                <a:solidFill>
+                  <a:srgbClr val="CCCCCC"/>
+                </a:solidFill>
+                <a:latin typeface="Courier New" pitchFamily="34" charset="0"/>
+                <a:ea typeface="Courier New" pitchFamily="34" charset="-122"/>
+                <a:cs typeface="Courier New" pitchFamily="34" charset="-120"/>
+              </a:rPr>
+              <a:t> </a:t>
+            </a:r>
+            <a:r>
+              <a:rPr lang="en-US" sz="900" dirty="0">
+                <a:solidFill>
+                  <a:srgbClr val="CE9178"/>
+                </a:solidFill>
+                <a:latin typeface="Courier New" pitchFamily="34" charset="0"/>
+                <a:ea typeface="Courier New" pitchFamily="34" charset="-122"/>
+                <a:cs typeface="Courier New" pitchFamily="34" charset="-120"/>
+              </a:rPr>
+              <a:t>'NomeCliente'</a:t>
+            </a:r>
+            <a:r>
+              <a:rPr lang="en-US" sz="900" dirty="0">
+                <a:solidFill>
+                  <a:srgbClr val="CCCCCC"/>
+                </a:solidFill>
+                <a:latin typeface="Courier New" pitchFamily="34" charset="0"/>
+                <a:ea typeface="Courier New" pitchFamily="34" charset="-122"/>
+                <a:cs typeface="Courier New" pitchFamily="34" charset="-120"/>
+              </a:rPr>
+              <a:t> </a:t>
+            </a:r>
+            <a:r>
+              <a:rPr lang="en-US" sz="900" dirty="0">
+                <a:solidFill>
+                  <a:srgbClr val="CCCCCC"/>
+                </a:solidFill>
+                <a:latin typeface="Courier New" pitchFamily="34" charset="0"/>
+                <a:ea typeface="Courier New" pitchFamily="34" charset="-122"/>
+                <a:cs typeface="Courier New" pitchFamily="34" charset="-120"/>
+              </a:rPr>
+              <a:t>}</a:t>
+            </a:r>
+            <a:r>
+              <a:rPr lang="en-US" sz="900" dirty="0">
+                <a:solidFill>
+                  <a:srgbClr val="CCCCCC"/>
+                </a:solidFill>
+                <a:latin typeface="Courier New" pitchFamily="34" charset="0"/>
+                <a:ea typeface="Courier New" pitchFamily="34" charset="-122"/>
+                <a:cs typeface="Courier New" pitchFamily="34" charset="-120"/>
+              </a:rPr>
+              <a:t> </a:t>
+            </a:r>
+            <a:r>
+              <a:rPr lang="en-US" sz="900" dirty="0">
+                <a:solidFill>
+                  <a:srgbClr val="CCCCCC"/>
+                </a:solidFill>
+                <a:latin typeface="Courier New" pitchFamily="34" charset="0"/>
+                <a:ea typeface="Courier New" pitchFamily="34" charset="-122"/>
+                <a:cs typeface="Courier New" pitchFamily="34" charset="-120"/>
+              </a:rPr>
+              <a:t>}</a:t>
             </a:r>
             <a:endParaRPr lang="en-US" sz="900" dirty="0"/>
           </a:p>
@@ -17279,7 +17538,73 @@
                 <a:ea typeface="Courier New" pitchFamily="34" charset="-122"/>
                 <a:cs typeface="Courier New" pitchFamily="34" charset="-120"/>
               </a:rPr>
-              <a:t>{</a:t>
+              <a:t>annotate</a:t>
+            </a:r>
+            <a:r>
+              <a:rPr lang="en-US" sz="900" dirty="0">
+                <a:solidFill>
+                  <a:srgbClr val="CCCCCC"/>
+                </a:solidFill>
+                <a:latin typeface="Courier New" pitchFamily="34" charset="0"/>
+                <a:ea typeface="Courier New" pitchFamily="34" charset="-122"/>
+                <a:cs typeface="Courier New" pitchFamily="34" charset="-120"/>
+              </a:rPr>
+              <a:t> </a:t>
+            </a:r>
+            <a:r>
+              <a:rPr lang="en-US" sz="900" dirty="0">
+                <a:solidFill>
+                  <a:srgbClr val="CCCCCC"/>
+                </a:solidFill>
+                <a:latin typeface="Courier New" pitchFamily="34" charset="0"/>
+                <a:ea typeface="Courier New" pitchFamily="34" charset="-122"/>
+                <a:cs typeface="Courier New" pitchFamily="34" charset="-120"/>
+              </a:rPr>
+              <a:t>entity</a:t>
+            </a:r>
+            <a:r>
+              <a:rPr lang="en-US" sz="900" dirty="0">
+                <a:solidFill>
+                  <a:srgbClr val="CCCCCC"/>
+                </a:solidFill>
+                <a:latin typeface="Courier New" pitchFamily="34" charset="0"/>
+                <a:ea typeface="Courier New" pitchFamily="34" charset="-122"/>
+                <a:cs typeface="Courier New" pitchFamily="34" charset="-120"/>
+              </a:rPr>
+              <a:t> </a:t>
+            </a:r>
+            <a:r>
+              <a:rPr lang="en-US" sz="900" dirty="0">
+                <a:solidFill>
+                  <a:srgbClr val="CCCCCC"/>
+                </a:solidFill>
+                <a:latin typeface="Courier New" pitchFamily="34" charset="0"/>
+                <a:ea typeface="Courier New" pitchFamily="34" charset="-122"/>
+                <a:cs typeface="Courier New" pitchFamily="34" charset="-120"/>
+              </a:rPr>
+              <a:t>ZC_PC_PEDIDO_APP</a:t>
+            </a:r>
+            <a:r>
+              <a:rPr lang="en-US" sz="900" dirty="0">
+                <a:solidFill>
+                  <a:srgbClr val="CCCCCC"/>
+                </a:solidFill>
+                <a:latin typeface="Courier New" pitchFamily="34" charset="0"/>
+                <a:ea typeface="Courier New" pitchFamily="34" charset="-122"/>
+                <a:cs typeface="Courier New" pitchFamily="34" charset="-120"/>
+              </a:rPr>
+              <a:t> </a:t>
+            </a:r>
+            <a:r>
+              <a:rPr lang="en-US" sz="900" dirty="0">
+                <a:solidFill>
+                  <a:srgbClr val="CCCCCC"/>
+                </a:solidFill>
+                <a:latin typeface="Courier New" pitchFamily="34" charset="0"/>
+                <a:ea typeface="Courier New" pitchFamily="34" charset="-122"/>
+                <a:cs typeface="Courier New" pitchFamily="34" charset="-120"/>
+              </a:rPr>
+              <a:t>with</a:t>
             </a:r>
             <a:endParaRPr lang="en-US" sz="900" dirty="0"/>
           </a:p>
@@ -17299,183 +17624,7 @@
                 <a:ea typeface="Courier New" pitchFamily="34" charset="-122"/>
                 <a:cs typeface="Courier New" pitchFamily="34" charset="-120"/>
               </a:rPr>
-              <a:t>  </a:t>
-            </a:r>
-            <a:r>
-              <a:rPr lang="en-US" sz="900" dirty="0">
-                <a:solidFill>
-                  <a:srgbClr val="CCCCCC"/>
-                </a:solidFill>
-                <a:latin typeface="Courier New" pitchFamily="34" charset="0"/>
-                <a:ea typeface="Courier New" pitchFamily="34" charset="-122"/>
-                <a:cs typeface="Courier New" pitchFamily="34" charset="-120"/>
-              </a:rPr>
-              <a:t>@</a:t>
-            </a:r>
-            <a:r>
-              <a:rPr lang="en-US" sz="900" dirty="0">
-                <a:solidFill>
-                  <a:srgbClr val="CCCCCC"/>
-                </a:solidFill>
-                <a:latin typeface="Courier New" pitchFamily="34" charset="0"/>
-                <a:ea typeface="Courier New" pitchFamily="34" charset="-122"/>
-                <a:cs typeface="Courier New" pitchFamily="34" charset="-120"/>
-              </a:rPr>
-              <a:t>UI</a:t>
-            </a:r>
-            <a:r>
-              <a:rPr lang="en-US" sz="900" dirty="0">
-                <a:solidFill>
-                  <a:srgbClr val="CCCCCC"/>
-                </a:solidFill>
-                <a:latin typeface="Courier New" pitchFamily="34" charset="0"/>
-                <a:ea typeface="Courier New" pitchFamily="34" charset="-122"/>
-                <a:cs typeface="Courier New" pitchFamily="34" charset="-120"/>
-              </a:rPr>
-              <a:t>.</a:t>
-            </a:r>
-            <a:r>
-              <a:rPr lang="en-US" sz="900" dirty="0">
-                <a:solidFill>
-                  <a:srgbClr val="CCCCCC"/>
-                </a:solidFill>
-                <a:latin typeface="Courier New" pitchFamily="34" charset="0"/>
-                <a:ea typeface="Courier New" pitchFamily="34" charset="-122"/>
-                <a:cs typeface="Courier New" pitchFamily="34" charset="-120"/>
-              </a:rPr>
-              <a:t>lineItem</a:t>
-            </a:r>
-            <a:r>
-              <a:rPr lang="en-US" sz="900" dirty="0">
-                <a:solidFill>
-                  <a:srgbClr val="CCCCCC"/>
-                </a:solidFill>
-                <a:latin typeface="Courier New" pitchFamily="34" charset="0"/>
-                <a:ea typeface="Courier New" pitchFamily="34" charset="-122"/>
-                <a:cs typeface="Courier New" pitchFamily="34" charset="-120"/>
-              </a:rPr>
-              <a:t>:</a:t>
-            </a:r>
-            <a:r>
-              <a:rPr lang="en-US" sz="900" dirty="0">
-                <a:solidFill>
-                  <a:srgbClr val="CCCCCC"/>
-                </a:solidFill>
-                <a:latin typeface="Courier New" pitchFamily="34" charset="0"/>
-                <a:ea typeface="Courier New" pitchFamily="34" charset="-122"/>
-                <a:cs typeface="Courier New" pitchFamily="34" charset="-120"/>
-              </a:rPr>
-              <a:t>       </a:t>
-            </a:r>
-            <a:r>
-              <a:rPr lang="en-US" sz="900" dirty="0">
-                <a:solidFill>
-                  <a:srgbClr val="CCCCCC"/>
-                </a:solidFill>
-                <a:latin typeface="Courier New" pitchFamily="34" charset="0"/>
-                <a:ea typeface="Courier New" pitchFamily="34" charset="-122"/>
-                <a:cs typeface="Courier New" pitchFamily="34" charset="-120"/>
-              </a:rPr>
-              <a:t>[</a:t>
-            </a:r>
-            <a:r>
-              <a:rPr lang="en-US" sz="900" dirty="0">
-                <a:solidFill>
-                  <a:srgbClr val="CCCCCC"/>
-                </a:solidFill>
-                <a:latin typeface="Courier New" pitchFamily="34" charset="0"/>
-                <a:ea typeface="Courier New" pitchFamily="34" charset="-122"/>
-                <a:cs typeface="Courier New" pitchFamily="34" charset="-120"/>
-              </a:rPr>
               <a:t>{</a:t>
-            </a:r>
-            <a:r>
-              <a:rPr lang="en-US" sz="900" dirty="0">
-                <a:solidFill>
-                  <a:srgbClr val="CCCCCC"/>
-                </a:solidFill>
-                <a:latin typeface="Courier New" pitchFamily="34" charset="0"/>
-                <a:ea typeface="Courier New" pitchFamily="34" charset="-122"/>
-                <a:cs typeface="Courier New" pitchFamily="34" charset="-120"/>
-              </a:rPr>
-              <a:t> </a:t>
-            </a:r>
-            <a:r>
-              <a:rPr lang="en-US" sz="900" dirty="0">
-                <a:solidFill>
-                  <a:srgbClr val="CCCCCC"/>
-                </a:solidFill>
-                <a:latin typeface="Courier New" pitchFamily="34" charset="0"/>
-                <a:ea typeface="Courier New" pitchFamily="34" charset="-122"/>
-                <a:cs typeface="Courier New" pitchFamily="34" charset="-120"/>
-              </a:rPr>
-              <a:t>position</a:t>
-            </a:r>
-            <a:r>
-              <a:rPr lang="en-US" sz="900" dirty="0">
-                <a:solidFill>
-                  <a:srgbClr val="CCCCCC"/>
-                </a:solidFill>
-                <a:latin typeface="Courier New" pitchFamily="34" charset="0"/>
-                <a:ea typeface="Courier New" pitchFamily="34" charset="-122"/>
-                <a:cs typeface="Courier New" pitchFamily="34" charset="-120"/>
-              </a:rPr>
-              <a:t>:</a:t>
-            </a:r>
-            <a:r>
-              <a:rPr lang="en-US" sz="900" dirty="0">
-                <a:solidFill>
-                  <a:srgbClr val="CCCCCC"/>
-                </a:solidFill>
-                <a:latin typeface="Courier New" pitchFamily="34" charset="0"/>
-                <a:ea typeface="Courier New" pitchFamily="34" charset="-122"/>
-                <a:cs typeface="Courier New" pitchFamily="34" charset="-120"/>
-              </a:rPr>
-              <a:t> </a:t>
-            </a:r>
-            <a:r>
-              <a:rPr lang="en-US" sz="900" dirty="0">
-                <a:solidFill>
-                  <a:srgbClr val="B5CEA8"/>
-                </a:solidFill>
-                <a:latin typeface="Courier New" pitchFamily="34" charset="0"/>
-                <a:ea typeface="Courier New" pitchFamily="34" charset="-122"/>
-                <a:cs typeface="Courier New" pitchFamily="34" charset="-120"/>
-              </a:rPr>
-              <a:t>10</a:t>
-            </a:r>
-            <a:r>
-              <a:rPr lang="en-US" sz="900" dirty="0">
-                <a:solidFill>
-                  <a:srgbClr val="CCCCCC"/>
-                </a:solidFill>
-                <a:latin typeface="Courier New" pitchFamily="34" charset="0"/>
-                <a:ea typeface="Courier New" pitchFamily="34" charset="-122"/>
-                <a:cs typeface="Courier New" pitchFamily="34" charset="-120"/>
-              </a:rPr>
-              <a:t> </a:t>
-            </a:r>
-            <a:r>
-              <a:rPr lang="en-US" sz="900" dirty="0">
-                <a:solidFill>
-                  <a:srgbClr val="CCCCCC"/>
-                </a:solidFill>
-                <a:latin typeface="Courier New" pitchFamily="34" charset="0"/>
-                <a:ea typeface="Courier New" pitchFamily="34" charset="-122"/>
-                <a:cs typeface="Courier New" pitchFamily="34" charset="-120"/>
-              </a:rPr>
-              <a:t>}</a:t>
-            </a:r>
-            <a:r>
-              <a:rPr lang="en-US" sz="900" dirty="0">
-                <a:solidFill>
-                  <a:srgbClr val="CCCCCC"/>
-                </a:solidFill>
-                <a:latin typeface="Courier New" pitchFamily="34" charset="0"/>
-                <a:ea typeface="Courier New" pitchFamily="34" charset="-122"/>
-                <a:cs typeface="Courier New" pitchFamily="34" charset="-120"/>
-              </a:rPr>
-              <a:t>]</a:t>
             </a:r>
             <a:endParaRPr lang="en-US" sz="900" dirty="0"/>
           </a:p>
@@ -17539,7 +17688,7 @@
                 <a:ea typeface="Courier New" pitchFamily="34" charset="-122"/>
                 <a:cs typeface="Courier New" pitchFamily="34" charset="-120"/>
               </a:rPr>
-              <a:t>selectionField</a:t>
+              <a:t>lineItem</a:t>
             </a:r>
             <a:r>
               <a:rPr lang="en-US" sz="900" dirty="0">
@@ -17561,6 +17710,39 @@
                 <a:ea typeface="Courier New" pitchFamily="34" charset="-122"/>
                 <a:cs typeface="Courier New" pitchFamily="34" charset="-120"/>
               </a:rPr>
+              <a:t>       </a:t>
+            </a:r>
+            <a:r>
+              <a:rPr lang="en-US" sz="900" dirty="0">
+                <a:solidFill>
+                  <a:srgbClr val="CCCCCC"/>
+                </a:solidFill>
+                <a:latin typeface="Courier New" pitchFamily="34" charset="0"/>
+                <a:ea typeface="Courier New" pitchFamily="34" charset="-122"/>
+                <a:cs typeface="Courier New" pitchFamily="34" charset="-120"/>
+              </a:rPr>
+              <a:t>[</a:t>
+            </a:r>
+            <a:r>
+              <a:rPr lang="en-US" sz="900" dirty="0">
+                <a:solidFill>
+                  <a:srgbClr val="CCCCCC"/>
+                </a:solidFill>
+                <a:latin typeface="Courier New" pitchFamily="34" charset="0"/>
+                <a:ea typeface="Courier New" pitchFamily="34" charset="-122"/>
+                <a:cs typeface="Courier New" pitchFamily="34" charset="-120"/>
+              </a:rPr>
+              <a:t>{</a:t>
+            </a:r>
+            <a:r>
+              <a:rPr lang="en-US" sz="900" dirty="0">
+                <a:solidFill>
+                  <a:srgbClr val="CCCCCC"/>
+                </a:solidFill>
+                <a:latin typeface="Courier New" pitchFamily="34" charset="0"/>
+                <a:ea typeface="Courier New" pitchFamily="34" charset="-122"/>
+                <a:cs typeface="Courier New" pitchFamily="34" charset="-120"/>
+              </a:rPr>
               <a:t> </a:t>
             </a:r>
             <a:r>
@@ -17572,18 +17754,18 @@
                 <a:ea typeface="Courier New" pitchFamily="34" charset="-122"/>
                 <a:cs typeface="Courier New" pitchFamily="34" charset="-120"/>
               </a:rPr>
-              <a:t>[</a:t>
-            </a:r>
-            <a:r>
-              <a:rPr lang="en-US" sz="900" dirty="0">
-                <a:solidFill>
-                  <a:srgbClr val="CCCCCC"/>
-                </a:solidFill>
-                <a:latin typeface="Courier New" pitchFamily="34" charset="0"/>
-                <a:ea typeface="Courier New" pitchFamily="34" charset="-122"/>
-                <a:cs typeface="Courier New" pitchFamily="34" charset="-120"/>
-              </a:rPr>
-              <a:t>{</a:t>
+              <a:t>position</a:t>
+            </a:r>
+            <a:r>
+              <a:rPr lang="en-US" sz="900" dirty="0">
+                <a:solidFill>
+                  <a:srgbClr val="CCCCCC"/>
+                </a:solidFill>
+                <a:latin typeface="Courier New" pitchFamily="34" charset="0"/>
+                <a:ea typeface="Courier New" pitchFamily="34" charset="-122"/>
+                <a:cs typeface="Courier New" pitchFamily="34" charset="-120"/>
+              </a:rPr>
+              <a:t>:</a:t>
             </a:r>
             <a:r>
               <a:rPr lang="en-US" sz="900" dirty="0">
@@ -17599,13 +17781,46 @@
             <a:r>
               <a:rPr lang="en-US" sz="900" dirty="0">
                 <a:solidFill>
-                  <a:srgbClr val="CCCCCC"/>
-                </a:solidFill>
-                <a:latin typeface="Courier New" pitchFamily="34" charset="0"/>
-                <a:ea typeface="Courier New" pitchFamily="34" charset="-122"/>
-                <a:cs typeface="Courier New" pitchFamily="34" charset="-120"/>
-              </a:rPr>
-              <a:t>position</a:t>
+                  <a:srgbClr val="B5CEA8"/>
+                </a:solidFill>
+                <a:latin typeface="Courier New" pitchFamily="34" charset="0"/>
+                <a:ea typeface="Courier New" pitchFamily="34" charset="-122"/>
+                <a:cs typeface="Courier New" pitchFamily="34" charset="-120"/>
+              </a:rPr>
+              <a:t>10</a:t>
+            </a:r>
+            <a:r>
+              <a:rPr lang="en-US" sz="900" dirty="0">
+                <a:solidFill>
+                  <a:srgbClr val="CCCCCC"/>
+                </a:solidFill>
+                <a:latin typeface="Courier New" pitchFamily="34" charset="0"/>
+                <a:ea typeface="Courier New" pitchFamily="34" charset="-122"/>
+                <a:cs typeface="Courier New" pitchFamily="34" charset="-120"/>
+              </a:rPr>
+              <a:t>,</a:t>
+            </a:r>
+            <a:r>
+              <a:rPr lang="en-US" sz="900" dirty="0">
+                <a:solidFill>
+                  <a:srgbClr val="CCCCCC"/>
+                </a:solidFill>
+                <a:latin typeface="Courier New" pitchFamily="34" charset="0"/>
+                <a:ea typeface="Courier New" pitchFamily="34" charset="-122"/>
+                <a:cs typeface="Courier New" pitchFamily="34" charset="-120"/>
+              </a:rPr>
+              <a:t> </a:t>
+            </a:r>
+            <a:r>
+              <a:rPr lang="en-US" sz="900" dirty="0">
+                <a:solidFill>
+                  <a:srgbClr val="CCCCCC"/>
+                </a:solidFill>
+                <a:latin typeface="Courier New" pitchFamily="34" charset="0"/>
+                <a:ea typeface="Courier New" pitchFamily="34" charset="-122"/>
+                <a:cs typeface="Courier New" pitchFamily="34" charset="-120"/>
+              </a:rPr>
+              <a:t>label</a:t>
             </a:r>
             <a:r>
               <a:rPr lang="en-US" sz="900" dirty="0">
@@ -17632,13 +17847,90 @@
             <a:r>
               <a:rPr lang="en-US" sz="900" dirty="0">
                 <a:solidFill>
-                  <a:srgbClr val="B5CEA8"/>
-                </a:solidFill>
-                <a:latin typeface="Courier New" pitchFamily="34" charset="0"/>
-                <a:ea typeface="Courier New" pitchFamily="34" charset="-122"/>
-                <a:cs typeface="Courier New" pitchFamily="34" charset="-120"/>
-              </a:rPr>
-              <a:t>10</a:t>
+                  <a:srgbClr val="CE9178"/>
+                </a:solidFill>
+                <a:latin typeface="Courier New" pitchFamily="34" charset="0"/>
+                <a:ea typeface="Courier New" pitchFamily="34" charset="-122"/>
+                <a:cs typeface="Courier New" pitchFamily="34" charset="-120"/>
+              </a:rPr>
+              <a:t>'Pedido'</a:t>
+            </a:r>
+            <a:r>
+              <a:rPr lang="en-US" sz="900" dirty="0">
+                <a:solidFill>
+                  <a:srgbClr val="CCCCCC"/>
+                </a:solidFill>
+                <a:latin typeface="Courier New" pitchFamily="34" charset="0"/>
+                <a:ea typeface="Courier New" pitchFamily="34" charset="-122"/>
+                <a:cs typeface="Courier New" pitchFamily="34" charset="-120"/>
+              </a:rPr>
+              <a:t>,</a:t>
+            </a:r>
+            <a:r>
+              <a:rPr lang="en-US" sz="900" dirty="0">
+                <a:solidFill>
+                  <a:srgbClr val="CCCCCC"/>
+                </a:solidFill>
+                <a:latin typeface="Courier New" pitchFamily="34" charset="0"/>
+                <a:ea typeface="Courier New" pitchFamily="34" charset="-122"/>
+                <a:cs typeface="Courier New" pitchFamily="34" charset="-120"/>
+              </a:rPr>
+              <a:t> </a:t>
+            </a:r>
+            <a:r>
+              <a:rPr lang="en-US" sz="900" dirty="0">
+                <a:solidFill>
+                  <a:srgbClr val="CCCCCC"/>
+                </a:solidFill>
+                <a:latin typeface="Courier New" pitchFamily="34" charset="0"/>
+                <a:ea typeface="Courier New" pitchFamily="34" charset="-122"/>
+                <a:cs typeface="Courier New" pitchFamily="34" charset="-120"/>
+              </a:rPr>
+              <a:t>importance</a:t>
+            </a:r>
+            <a:r>
+              <a:rPr lang="en-US" sz="900" dirty="0">
+                <a:solidFill>
+                  <a:srgbClr val="CCCCCC"/>
+                </a:solidFill>
+                <a:latin typeface="Courier New" pitchFamily="34" charset="0"/>
+                <a:ea typeface="Courier New" pitchFamily="34" charset="-122"/>
+                <a:cs typeface="Courier New" pitchFamily="34" charset="-120"/>
+              </a:rPr>
+              <a:t>:</a:t>
+            </a:r>
+            <a:r>
+              <a:rPr lang="en-US" sz="900" dirty="0">
+                <a:solidFill>
+                  <a:srgbClr val="CCCCCC"/>
+                </a:solidFill>
+                <a:latin typeface="Courier New" pitchFamily="34" charset="0"/>
+                <a:ea typeface="Courier New" pitchFamily="34" charset="-122"/>
+                <a:cs typeface="Courier New" pitchFamily="34" charset="-120"/>
+              </a:rPr>
+              <a:t> </a:t>
+            </a:r>
+            <a:r>
+              <a:rPr lang="en-US" sz="900" dirty="0">
+                <a:solidFill>
+                  <a:srgbClr val="CCCCCC"/>
+                </a:solidFill>
+                <a:latin typeface="Courier New" pitchFamily="34" charset="0"/>
+                <a:ea typeface="Courier New" pitchFamily="34" charset="-122"/>
+                <a:cs typeface="Courier New" pitchFamily="34" charset="-120"/>
+              </a:rPr>
+              <a:t>#</a:t>
+            </a:r>
+            <a:r>
+              <a:rPr lang="en-US" sz="900" dirty="0">
+                <a:solidFill>
+                  <a:srgbClr val="CCCCCC"/>
+                </a:solidFill>
+                <a:latin typeface="Courier New" pitchFamily="34" charset="0"/>
+                <a:ea typeface="Courier New" pitchFamily="34" charset="-122"/>
+                <a:cs typeface="Courier New" pitchFamily="34" charset="-120"/>
+              </a:rPr>
+              <a:t>HIGH</a:t>
             </a:r>
             <a:r>
               <a:rPr lang="en-US" sz="900" dirty="0">
@@ -17702,7 +17994,7 @@
                 <a:ea typeface="Courier New" pitchFamily="34" charset="-122"/>
                 <a:cs typeface="Courier New" pitchFamily="34" charset="-120"/>
               </a:rPr>
-              <a:t>TravelID</a:t>
+              <a:t>NumeroPedido</a:t>
             </a:r>
             <a:r>
               <a:rPr lang="en-US" sz="900" dirty="0">
@@ -17907,6 +18199,72 @@
                 <a:ea typeface="Courier New" pitchFamily="34" charset="-122"/>
                 <a:cs typeface="Courier New" pitchFamily="34" charset="-120"/>
               </a:rPr>
+              <a:t>,</a:t>
+            </a:r>
+            <a:r>
+              <a:rPr lang="en-US" sz="900" dirty="0">
+                <a:solidFill>
+                  <a:srgbClr val="CCCCCC"/>
+                </a:solidFill>
+                <a:latin typeface="Courier New" pitchFamily="34" charset="0"/>
+                <a:ea typeface="Courier New" pitchFamily="34" charset="-122"/>
+                <a:cs typeface="Courier New" pitchFamily="34" charset="-120"/>
+              </a:rPr>
+              <a:t> </a:t>
+            </a:r>
+            <a:r>
+              <a:rPr lang="en-US" sz="900" dirty="0">
+                <a:solidFill>
+                  <a:srgbClr val="CCCCCC"/>
+                </a:solidFill>
+                <a:latin typeface="Courier New" pitchFamily="34" charset="0"/>
+                <a:ea typeface="Courier New" pitchFamily="34" charset="-122"/>
+                <a:cs typeface="Courier New" pitchFamily="34" charset="-120"/>
+              </a:rPr>
+              <a:t>label</a:t>
+            </a:r>
+            <a:r>
+              <a:rPr lang="en-US" sz="900" dirty="0">
+                <a:solidFill>
+                  <a:srgbClr val="CCCCCC"/>
+                </a:solidFill>
+                <a:latin typeface="Courier New" pitchFamily="34" charset="0"/>
+                <a:ea typeface="Courier New" pitchFamily="34" charset="-122"/>
+                <a:cs typeface="Courier New" pitchFamily="34" charset="-120"/>
+              </a:rPr>
+              <a:t>:</a:t>
+            </a:r>
+            <a:r>
+              <a:rPr lang="en-US" sz="900" dirty="0">
+                <a:solidFill>
+                  <a:srgbClr val="CCCCCC"/>
+                </a:solidFill>
+                <a:latin typeface="Courier New" pitchFamily="34" charset="0"/>
+                <a:ea typeface="Courier New" pitchFamily="34" charset="-122"/>
+                <a:cs typeface="Courier New" pitchFamily="34" charset="-120"/>
+              </a:rPr>
+              <a:t> </a:t>
+            </a:r>
+            <a:r>
+              <a:rPr lang="en-US" sz="900" dirty="0">
+                <a:solidFill>
+                  <a:srgbClr val="CE9178"/>
+                </a:solidFill>
+                <a:latin typeface="Courier New" pitchFamily="34" charset="0"/>
+                <a:ea typeface="Courier New" pitchFamily="34" charset="-122"/>
+                <a:cs typeface="Courier New" pitchFamily="34" charset="-120"/>
+              </a:rPr>
+              <a:t>'CPF'</a:t>
+            </a:r>
+            <a:r>
+              <a:rPr lang="en-US" sz="900" dirty="0">
+                <a:solidFill>
+                  <a:srgbClr val="CCCCCC"/>
+                </a:solidFill>
+                <a:latin typeface="Courier New" pitchFamily="34" charset="0"/>
+                <a:ea typeface="Courier New" pitchFamily="34" charset="-122"/>
+                <a:cs typeface="Courier New" pitchFamily="34" charset="-120"/>
+              </a:rPr>
               <a:t> </a:t>
             </a:r>
             <a:r>
@@ -18156,7 +18514,7 @@
                 <a:ea typeface="Courier New" pitchFamily="34" charset="-122"/>
                 <a:cs typeface="Courier New" pitchFamily="34" charset="-120"/>
               </a:rPr>
-              <a:t>AgencyID</a:t>
+              <a:t>CpfCliente</a:t>
             </a:r>
             <a:r>
               <a:rPr lang="en-US" sz="900" dirty="0">
@@ -18350,7 +18708,7 @@
                 <a:ea typeface="Courier New" pitchFamily="34" charset="-122"/>
                 <a:cs typeface="Courier New" pitchFamily="34" charset="-120"/>
               </a:rPr>
-              <a:t>90</a:t>
+              <a:t>40</a:t>
             </a:r>
             <a:r>
               <a:rPr lang="en-US" sz="900" dirty="0">
@@ -18383,7 +18741,7 @@
                 <a:ea typeface="Courier New" pitchFamily="34" charset="-122"/>
                 <a:cs typeface="Courier New" pitchFamily="34" charset="-120"/>
               </a:rPr>
-              <a:t>criticality</a:t>
+              <a:t>label</a:t>
             </a:r>
             <a:r>
               <a:rPr lang="en-US" sz="900" dirty="0">
@@ -18416,40 +18774,18 @@
                 <a:ea typeface="Courier New" pitchFamily="34" charset="-122"/>
                 <a:cs typeface="Courier New" pitchFamily="34" charset="-120"/>
               </a:rPr>
-              <a:t>'OverallStatusCriticality'</a:t>
-            </a:r>
-            <a:r>
-              <a:rPr lang="en-US" sz="900" dirty="0">
-                <a:solidFill>
-                  <a:srgbClr val="CCCCCC"/>
-                </a:solidFill>
-                <a:latin typeface="Courier New" pitchFamily="34" charset="0"/>
-                <a:ea typeface="Courier New" pitchFamily="34" charset="-122"/>
-                <a:cs typeface="Courier New" pitchFamily="34" charset="-120"/>
-              </a:rPr>
-              <a:t> </a:t>
-            </a:r>
-            <a:r>
-              <a:rPr lang="en-US" sz="900" dirty="0">
-                <a:solidFill>
-                  <a:srgbClr val="CCCCCC"/>
-                </a:solidFill>
-                <a:latin typeface="Courier New" pitchFamily="34" charset="0"/>
-                <a:ea typeface="Courier New" pitchFamily="34" charset="-122"/>
-                <a:cs typeface="Courier New" pitchFamily="34" charset="-120"/>
-              </a:rPr>
-              <a:t>}</a:t>
-            </a:r>
-            <a:r>
-              <a:rPr lang="en-US" sz="900" dirty="0">
-                <a:solidFill>
-                  <a:srgbClr val="CCCCCC"/>
-                </a:solidFill>
-                <a:latin typeface="Courier New" pitchFamily="34" charset="0"/>
-                <a:ea typeface="Courier New" pitchFamily="34" charset="-122"/>
-                <a:cs typeface="Courier New" pitchFamily="34" charset="-120"/>
-              </a:rPr>
-              <a:t>]</a:t>
+              <a:t>'Status do pedido'</a:t>
+            </a:r>
+            <a:r>
+              <a:rPr lang="en-US" sz="900" dirty="0">
+                <a:solidFill>
+                  <a:srgbClr val="CCCCCC"/>
+                </a:solidFill>
+                <a:latin typeface="Courier New" pitchFamily="34" charset="0"/>
+                <a:ea typeface="Courier New" pitchFamily="34" charset="-122"/>
+                <a:cs typeface="Courier New" pitchFamily="34" charset="-120"/>
+              </a:rPr>
+              <a:t>,</a:t>
             </a:r>
             <a:endParaRPr lang="en-US" sz="900" dirty="0"/>
           </a:p>
@@ -18469,51 +18805,18 @@
                 <a:ea typeface="Courier New" pitchFamily="34" charset="-122"/>
                 <a:cs typeface="Courier New" pitchFamily="34" charset="-120"/>
               </a:rPr>
-              <a:t>  </a:t>
-            </a:r>
-            <a:r>
-              <a:rPr lang="en-US" sz="900" dirty="0">
-                <a:solidFill>
-                  <a:srgbClr val="CCCCCC"/>
-                </a:solidFill>
-                <a:latin typeface="Courier New" pitchFamily="34" charset="0"/>
-                <a:ea typeface="Courier New" pitchFamily="34" charset="-122"/>
-                <a:cs typeface="Courier New" pitchFamily="34" charset="-120"/>
-              </a:rPr>
-              <a:t>@</a:t>
-            </a:r>
-            <a:r>
-              <a:rPr lang="en-US" sz="900" dirty="0">
-                <a:solidFill>
-                  <a:srgbClr val="CCCCCC"/>
-                </a:solidFill>
-                <a:latin typeface="Courier New" pitchFamily="34" charset="0"/>
-                <a:ea typeface="Courier New" pitchFamily="34" charset="-122"/>
-                <a:cs typeface="Courier New" pitchFamily="34" charset="-120"/>
-              </a:rPr>
-              <a:t>UI</a:t>
-            </a:r>
-            <a:r>
-              <a:rPr lang="en-US" sz="900" dirty="0">
-                <a:solidFill>
-                  <a:srgbClr val="CCCCCC"/>
-                </a:solidFill>
-                <a:latin typeface="Courier New" pitchFamily="34" charset="0"/>
-                <a:ea typeface="Courier New" pitchFamily="34" charset="-122"/>
-                <a:cs typeface="Courier New" pitchFamily="34" charset="-120"/>
-              </a:rPr>
-              <a:t>.</a:t>
-            </a:r>
-            <a:r>
-              <a:rPr lang="en-US" sz="900" dirty="0">
-                <a:solidFill>
-                  <a:srgbClr val="CCCCCC"/>
-                </a:solidFill>
-                <a:latin typeface="Courier New" pitchFamily="34" charset="0"/>
-                <a:ea typeface="Courier New" pitchFamily="34" charset="-122"/>
-                <a:cs typeface="Courier New" pitchFamily="34" charset="-120"/>
-              </a:rPr>
-              <a:t>textArrangement</a:t>
+              <a:t>                  </a:t>
+            </a:r>
+            <a:r>
+              <a:rPr lang="en-US" sz="900" dirty="0">
+                <a:solidFill>
+                  <a:srgbClr val="CCCCCC"/>
+                </a:solidFill>
+                <a:latin typeface="Courier New" pitchFamily="34" charset="0"/>
+                <a:ea typeface="Courier New" pitchFamily="34" charset="-122"/>
+                <a:cs typeface="Courier New" pitchFamily="34" charset="-120"/>
+              </a:rPr>
+              <a:t>criticality</a:t>
             </a:r>
             <a:r>
               <a:rPr lang="en-US" sz="900" dirty="0">
@@ -18540,24 +18843,46 @@
             <a:r>
               <a:rPr lang="en-US" sz="900" dirty="0">
                 <a:solidFill>
-                  <a:srgbClr val="CCCCCC"/>
-                </a:solidFill>
-                <a:latin typeface="Courier New" pitchFamily="34" charset="0"/>
-                <a:ea typeface="Courier New" pitchFamily="34" charset="-122"/>
-                <a:cs typeface="Courier New" pitchFamily="34" charset="-120"/>
-              </a:rPr>
-              <a:t>#</a:t>
-            </a:r>
-            <a:r>
-              <a:rPr lang="en-US" sz="900" dirty="0">
-                <a:solidFill>
-                  <a:srgbClr val="CCCCCC"/>
-                </a:solidFill>
-                <a:latin typeface="Courier New" pitchFamily="34" charset="0"/>
-                <a:ea typeface="Courier New" pitchFamily="34" charset="-122"/>
-                <a:cs typeface="Courier New" pitchFamily="34" charset="-120"/>
-              </a:rPr>
-              <a:t>TEXT_ONLY</a:t>
+                  <a:srgbClr val="CE9178"/>
+                </a:solidFill>
+                <a:latin typeface="Courier New" pitchFamily="34" charset="0"/>
+                <a:ea typeface="Courier New" pitchFamily="34" charset="-122"/>
+                <a:cs typeface="Courier New" pitchFamily="34" charset="-120"/>
+              </a:rPr>
+              <a:t>'StatusPedidoCriticality'</a:t>
+            </a:r>
+            <a:r>
+              <a:rPr lang="en-US" sz="900" dirty="0">
+                <a:solidFill>
+                  <a:srgbClr val="CCCCCC"/>
+                </a:solidFill>
+                <a:latin typeface="Courier New" pitchFamily="34" charset="0"/>
+                <a:ea typeface="Courier New" pitchFamily="34" charset="-122"/>
+                <a:cs typeface="Courier New" pitchFamily="34" charset="-120"/>
+              </a:rPr>
+              <a:t> </a:t>
+            </a:r>
+            <a:r>
+              <a:rPr lang="en-US" sz="900" dirty="0">
+                <a:solidFill>
+                  <a:srgbClr val="CCCCCC"/>
+                </a:solidFill>
+                <a:latin typeface="Courier New" pitchFamily="34" charset="0"/>
+                <a:ea typeface="Courier New" pitchFamily="34" charset="-122"/>
+                <a:cs typeface="Courier New" pitchFamily="34" charset="-120"/>
+              </a:rPr>
+              <a:t>}</a:t>
+            </a:r>
+            <a:r>
+              <a:rPr lang="en-US" sz="900" dirty="0">
+                <a:solidFill>
+                  <a:srgbClr val="CCCCCC"/>
+                </a:solidFill>
+                <a:latin typeface="Courier New" pitchFamily="34" charset="0"/>
+                <a:ea typeface="Courier New" pitchFamily="34" charset="-122"/>
+                <a:cs typeface="Courier New" pitchFamily="34" charset="-120"/>
+              </a:rPr>
+              <a:t>]</a:t>
             </a:r>
             <a:endParaRPr lang="en-US" sz="900" dirty="0"/>
           </a:p>
@@ -18588,7 +18913,203 @@
                 <a:ea typeface="Courier New" pitchFamily="34" charset="-122"/>
                 <a:cs typeface="Courier New" pitchFamily="34" charset="-120"/>
               </a:rPr>
-              <a:t>OverallStatus</a:t>
+              <a:t>@</a:t>
+            </a:r>
+            <a:r>
+              <a:rPr lang="en-US" sz="900" dirty="0">
+                <a:solidFill>
+                  <a:srgbClr val="CCCCCC"/>
+                </a:solidFill>
+                <a:latin typeface="Courier New" pitchFamily="34" charset="0"/>
+                <a:ea typeface="Courier New" pitchFamily="34" charset="-122"/>
+                <a:cs typeface="Courier New" pitchFamily="34" charset="-120"/>
+              </a:rPr>
+              <a:t>UI</a:t>
+            </a:r>
+            <a:r>
+              <a:rPr lang="en-US" sz="900" dirty="0">
+                <a:solidFill>
+                  <a:srgbClr val="CCCCCC"/>
+                </a:solidFill>
+                <a:latin typeface="Courier New" pitchFamily="34" charset="0"/>
+                <a:ea typeface="Courier New" pitchFamily="34" charset="-122"/>
+                <a:cs typeface="Courier New" pitchFamily="34" charset="-120"/>
+              </a:rPr>
+              <a:t>.</a:t>
+            </a:r>
+            <a:r>
+              <a:rPr lang="en-US" sz="900" dirty="0">
+                <a:solidFill>
+                  <a:srgbClr val="CCCCCC"/>
+                </a:solidFill>
+                <a:latin typeface="Courier New" pitchFamily="34" charset="0"/>
+                <a:ea typeface="Courier New" pitchFamily="34" charset="-122"/>
+                <a:cs typeface="Courier New" pitchFamily="34" charset="-120"/>
+              </a:rPr>
+              <a:t>selectionField</a:t>
+            </a:r>
+            <a:r>
+              <a:rPr lang="en-US" sz="900" dirty="0">
+                <a:solidFill>
+                  <a:srgbClr val="CCCCCC"/>
+                </a:solidFill>
+                <a:latin typeface="Courier New" pitchFamily="34" charset="0"/>
+                <a:ea typeface="Courier New" pitchFamily="34" charset="-122"/>
+                <a:cs typeface="Courier New" pitchFamily="34" charset="-120"/>
+              </a:rPr>
+              <a:t>:</a:t>
+            </a:r>
+            <a:r>
+              <a:rPr lang="en-US" sz="900" dirty="0">
+                <a:solidFill>
+                  <a:srgbClr val="CCCCCC"/>
+                </a:solidFill>
+                <a:latin typeface="Courier New" pitchFamily="34" charset="0"/>
+                <a:ea typeface="Courier New" pitchFamily="34" charset="-122"/>
+                <a:cs typeface="Courier New" pitchFamily="34" charset="-120"/>
+              </a:rPr>
+              <a:t> </a:t>
+            </a:r>
+            <a:r>
+              <a:rPr lang="en-US" sz="900" dirty="0">
+                <a:solidFill>
+                  <a:srgbClr val="CCCCCC"/>
+                </a:solidFill>
+                <a:latin typeface="Courier New" pitchFamily="34" charset="0"/>
+                <a:ea typeface="Courier New" pitchFamily="34" charset="-122"/>
+                <a:cs typeface="Courier New" pitchFamily="34" charset="-120"/>
+              </a:rPr>
+              <a:t>[</a:t>
+            </a:r>
+            <a:r>
+              <a:rPr lang="en-US" sz="900" dirty="0">
+                <a:solidFill>
+                  <a:srgbClr val="CCCCCC"/>
+                </a:solidFill>
+                <a:latin typeface="Courier New" pitchFamily="34" charset="0"/>
+                <a:ea typeface="Courier New" pitchFamily="34" charset="-122"/>
+                <a:cs typeface="Courier New" pitchFamily="34" charset="-120"/>
+              </a:rPr>
+              <a:t>{</a:t>
+            </a:r>
+            <a:r>
+              <a:rPr lang="en-US" sz="900" dirty="0">
+                <a:solidFill>
+                  <a:srgbClr val="CCCCCC"/>
+                </a:solidFill>
+                <a:latin typeface="Courier New" pitchFamily="34" charset="0"/>
+                <a:ea typeface="Courier New" pitchFamily="34" charset="-122"/>
+                <a:cs typeface="Courier New" pitchFamily="34" charset="-120"/>
+              </a:rPr>
+              <a:t> </a:t>
+            </a:r>
+            <a:r>
+              <a:rPr lang="en-US" sz="900" dirty="0">
+                <a:solidFill>
+                  <a:srgbClr val="CCCCCC"/>
+                </a:solidFill>
+                <a:latin typeface="Courier New" pitchFamily="34" charset="0"/>
+                <a:ea typeface="Courier New" pitchFamily="34" charset="-122"/>
+                <a:cs typeface="Courier New" pitchFamily="34" charset="-120"/>
+              </a:rPr>
+              <a:t>position</a:t>
+            </a:r>
+            <a:r>
+              <a:rPr lang="en-US" sz="900" dirty="0">
+                <a:solidFill>
+                  <a:srgbClr val="CCCCCC"/>
+                </a:solidFill>
+                <a:latin typeface="Courier New" pitchFamily="34" charset="0"/>
+                <a:ea typeface="Courier New" pitchFamily="34" charset="-122"/>
+                <a:cs typeface="Courier New" pitchFamily="34" charset="-120"/>
+              </a:rPr>
+              <a:t>:</a:t>
+            </a:r>
+            <a:r>
+              <a:rPr lang="en-US" sz="900" dirty="0">
+                <a:solidFill>
+                  <a:srgbClr val="CCCCCC"/>
+                </a:solidFill>
+                <a:latin typeface="Courier New" pitchFamily="34" charset="0"/>
+                <a:ea typeface="Courier New" pitchFamily="34" charset="-122"/>
+                <a:cs typeface="Courier New" pitchFamily="34" charset="-120"/>
+              </a:rPr>
+              <a:t> </a:t>
+            </a:r>
+            <a:r>
+              <a:rPr lang="en-US" sz="900" dirty="0">
+                <a:solidFill>
+                  <a:srgbClr val="B5CEA8"/>
+                </a:solidFill>
+                <a:latin typeface="Courier New" pitchFamily="34" charset="0"/>
+                <a:ea typeface="Courier New" pitchFamily="34" charset="-122"/>
+                <a:cs typeface="Courier New" pitchFamily="34" charset="-120"/>
+              </a:rPr>
+              <a:t>30</a:t>
+            </a:r>
+            <a:r>
+              <a:rPr lang="en-US" sz="900" dirty="0">
+                <a:solidFill>
+                  <a:srgbClr val="CCCCCC"/>
+                </a:solidFill>
+                <a:latin typeface="Courier New" pitchFamily="34" charset="0"/>
+                <a:ea typeface="Courier New" pitchFamily="34" charset="-122"/>
+                <a:cs typeface="Courier New" pitchFamily="34" charset="-120"/>
+              </a:rPr>
+              <a:t> </a:t>
+            </a:r>
+            <a:r>
+              <a:rPr lang="en-US" sz="900" dirty="0">
+                <a:solidFill>
+                  <a:srgbClr val="CCCCCC"/>
+                </a:solidFill>
+                <a:latin typeface="Courier New" pitchFamily="34" charset="0"/>
+                <a:ea typeface="Courier New" pitchFamily="34" charset="-122"/>
+                <a:cs typeface="Courier New" pitchFamily="34" charset="-120"/>
+              </a:rPr>
+              <a:t>}</a:t>
+            </a:r>
+            <a:r>
+              <a:rPr lang="en-US" sz="900" dirty="0">
+                <a:solidFill>
+                  <a:srgbClr val="CCCCCC"/>
+                </a:solidFill>
+                <a:latin typeface="Courier New" pitchFamily="34" charset="0"/>
+                <a:ea typeface="Courier New" pitchFamily="34" charset="-122"/>
+                <a:cs typeface="Courier New" pitchFamily="34" charset="-120"/>
+              </a:rPr>
+              <a:t>]</a:t>
+            </a:r>
+            <a:endParaRPr lang="en-US" sz="900" dirty="0"/>
+          </a:p>
+          <a:p>
+            <a:pPr indent="0" marL="0">
+              <a:lnSpc>
+                <a:spcPct val="105000"/>
+              </a:lnSpc>
+              <a:buNone/>
+            </a:pPr>
+            <a:r>
+              <a:rPr lang="en-US" sz="900" dirty="0">
+                <a:solidFill>
+                  <a:srgbClr val="CCCCCC"/>
+                </a:solidFill>
+                <a:latin typeface="Courier New" pitchFamily="34" charset="0"/>
+                <a:ea typeface="Courier New" pitchFamily="34" charset="-122"/>
+                <a:cs typeface="Courier New" pitchFamily="34" charset="-120"/>
+              </a:rPr>
+              <a:t>  </a:t>
+            </a:r>
+            <a:r>
+              <a:rPr lang="en-US" sz="900" dirty="0">
+                <a:solidFill>
+                  <a:srgbClr val="CCCCCC"/>
+                </a:solidFill>
+                <a:latin typeface="Courier New" pitchFamily="34" charset="0"/>
+                <a:ea typeface="Courier New" pitchFamily="34" charset="-122"/>
+                <a:cs typeface="Courier New" pitchFamily="34" charset="-120"/>
+              </a:rPr>
+              <a:t>StatusPedido</a:t>
             </a:r>
             <a:r>
               <a:rPr lang="en-US" sz="900" dirty="0">
@@ -19174,7 +19695,26 @@
                   <a:srgbClr val="556B82"/>
                 </a:solidFill>
               </a:rPr>
-              <a:t>Status colorido com ícone, mostrando só o texto.</a:t>
+              <a:t>Status colorido com ícone; o </a:t>
+            </a:r>
+            <a:r>
+              <a:rPr lang="en-US" sz="1050" dirty="0">
+                <a:solidFill>
+                  <a:srgbClr val="0064D9"/>
+                </a:solidFill>
+                <a:latin typeface="Courier New" pitchFamily="34" charset="0"/>
+                <a:ea typeface="Courier New" pitchFamily="34" charset="-122"/>
+                <a:cs typeface="Courier New" pitchFamily="34" charset="-120"/>
+              </a:rPr>
+              <a:t>#TEXT_ONLY</a:t>
+            </a:r>
+            <a:r>
+              <a:rPr lang="en-US" sz="1050" dirty="0">
+                <a:solidFill>
+                  <a:srgbClr val="556B82"/>
+                </a:solidFill>
+              </a:rPr>
+              <a:t> da projeção mostra só o texto.</a:t>
             </a:r>
             <a:endParaRPr lang="en-US" sz="1400" dirty="0"/>
           </a:p>
@@ -19993,7 +20533,7 @@
                   <a:srgbClr val="1D2D3E"/>
                 </a:solidFill>
               </a:rPr>
-              <a:t>cores e ações (03.07) e importância e ordenação (03.06) aprofundam estas propriedades.</a:t>
+              <a:t>cores e ações (05.07) e importância e ordenação (05.06) aprofundam estas propriedades.</a:t>
             </a:r>
             <a:endParaRPr lang="en-US" sz="1400" dirty="0"/>
           </a:p>
